--- a/topic08-arrays-of-objects/unit-1/talk-2-gym-app/oo-gym-v1.pptx
+++ b/topic08-arrays-of-objects/unit-1/talk-2-gym-app/oo-gym-v1.pptx
@@ -2,7 +2,7 @@
 <file path=ppt/presentation.xml><?xml version="1.0" encoding="utf-8"?>
 <p:presentation xmlns:a="http://schemas.openxmlformats.org/drawingml/2006/main" xmlns:r="http://schemas.openxmlformats.org/officeDocument/2006/relationships" xmlns:p="http://schemas.openxmlformats.org/presentationml/2006/main" saveSubsetFonts="1">
   <p:sldMasterIdLst>
-    <p:sldMasterId id="2147483648" r:id="rId1"/>
+    <p:sldMasterId id="2147483660" r:id="rId1"/>
   </p:sldMasterIdLst>
   <p:notesMasterIdLst>
     <p:notesMasterId r:id="rId48"/>
@@ -253,7 +253,7 @@
           <a:p>
             <a:fld id="{56BC3C30-7F3D-4B20-9974-47C57B22CA6E}" type="datetimeFigureOut">
               <a:rPr lang="en-IE" smtClean="0"/>
-              <a:t>11/11/2024</a:t>
+              <a:t>03/11/2025</a:t>
             </a:fld>
             <a:endParaRPr lang="en-IE"/>
           </a:p>
@@ -1249,9 +1249,10 @@
           <a:lstStyle/>
           <a:p>
             <a:r>
-              <a:rPr lang="en-US" dirty="0"/>
+              <a:rPr lang="en-GB"/>
               <a:t>Click to edit Master title style</a:t>
             </a:r>
+            <a:endParaRPr lang="en-US" dirty="0"/>
           </a:p>
         </p:txBody>
       </p:sp>
@@ -1367,9 +1368,10 @@
           </a:lstStyle>
           <a:p>
             <a:r>
-              <a:rPr lang="en-US" dirty="0"/>
+              <a:rPr lang="en-GB"/>
               <a:t>Click to edit Master subtitle style</a:t>
             </a:r>
+            <a:endParaRPr lang="en-US" dirty="0"/>
           </a:p>
         </p:txBody>
       </p:sp>
@@ -1391,7 +1393,7 @@
             <a:fld id="{1D8BD707-D9CF-40AE-B4C6-C98DA3205C09}" type="datetimeFigureOut">
               <a:rPr lang="en-US" smtClean="0"/>
               <a:pPr/>
-              <a:t>11/11/24</a:t>
+              <a:t>11/3/25</a:t>
             </a:fld>
             <a:endParaRPr lang="en-US"/>
           </a:p>
@@ -1441,6 +1443,11 @@
         </p:txBody>
       </p:sp>
     </p:spTree>
+    <p:extLst>
+      <p:ext uri="{BB962C8B-B14F-4D97-AF65-F5344CB8AC3E}">
+        <p14:creationId xmlns:p14="http://schemas.microsoft.com/office/powerpoint/2010/main" val="2739190056"/>
+      </p:ext>
+    </p:extLst>
   </p:cSld>
   <p:clrMapOvr>
     <a:masterClrMapping/>
@@ -1481,9 +1488,10 @@
           <a:lstStyle/>
           <a:p>
             <a:r>
-              <a:rPr lang="en-US"/>
+              <a:rPr lang="en-GB"/>
               <a:t>Click to edit Master title style</a:t>
             </a:r>
+            <a:endParaRPr lang="en-US"/>
           </a:p>
         </p:txBody>
       </p:sp>
@@ -1504,37 +1512,38 @@
           <a:p>
             <a:pPr lvl="0"/>
             <a:r>
-              <a:rPr lang="en-US"/>
+              <a:rPr lang="en-GB"/>
               <a:t>Click to edit Master text styles</a:t>
             </a:r>
           </a:p>
           <a:p>
             <a:pPr lvl="1"/>
             <a:r>
-              <a:rPr lang="en-US"/>
+              <a:rPr lang="en-GB"/>
               <a:t>Second level</a:t>
             </a:r>
           </a:p>
           <a:p>
             <a:pPr lvl="2"/>
             <a:r>
-              <a:rPr lang="en-US"/>
+              <a:rPr lang="en-GB"/>
               <a:t>Third level</a:t>
             </a:r>
           </a:p>
           <a:p>
             <a:pPr lvl="3"/>
             <a:r>
-              <a:rPr lang="en-US"/>
+              <a:rPr lang="en-GB"/>
               <a:t>Fourth level</a:t>
             </a:r>
           </a:p>
           <a:p>
             <a:pPr lvl="4"/>
             <a:r>
-              <a:rPr lang="en-US"/>
+              <a:rPr lang="en-GB"/>
               <a:t>Fifth level</a:t>
             </a:r>
+            <a:endParaRPr lang="en-US"/>
           </a:p>
         </p:txBody>
       </p:sp>
@@ -1556,7 +1565,7 @@
             <a:fld id="{1D8BD707-D9CF-40AE-B4C6-C98DA3205C09}" type="datetimeFigureOut">
               <a:rPr lang="en-US" smtClean="0"/>
               <a:pPr/>
-              <a:t>11/11/24</a:t>
+              <a:t>11/3/25</a:t>
             </a:fld>
             <a:endParaRPr lang="en-US"/>
           </a:p>
@@ -1606,6 +1615,11 @@
         </p:txBody>
       </p:sp>
     </p:spTree>
+    <p:extLst>
+      <p:ext uri="{BB962C8B-B14F-4D97-AF65-F5344CB8AC3E}">
+        <p14:creationId xmlns:p14="http://schemas.microsoft.com/office/powerpoint/2010/main" val="3805994164"/>
+      </p:ext>
+    </p:extLst>
   </p:cSld>
   <p:clrMapOvr>
     <a:masterClrMapping/>
@@ -1651,9 +1665,10 @@
           <a:lstStyle/>
           <a:p>
             <a:r>
-              <a:rPr lang="en-US"/>
+              <a:rPr lang="en-GB"/>
               <a:t>Click to edit Master title style</a:t>
             </a:r>
+            <a:endParaRPr lang="en-US"/>
           </a:p>
         </p:txBody>
       </p:sp>
@@ -1679,37 +1694,38 @@
           <a:p>
             <a:pPr lvl="0"/>
             <a:r>
-              <a:rPr lang="en-US"/>
+              <a:rPr lang="en-GB"/>
               <a:t>Click to edit Master text styles</a:t>
             </a:r>
           </a:p>
           <a:p>
             <a:pPr lvl="1"/>
             <a:r>
-              <a:rPr lang="en-US"/>
+              <a:rPr lang="en-GB"/>
               <a:t>Second level</a:t>
             </a:r>
           </a:p>
           <a:p>
             <a:pPr lvl="2"/>
             <a:r>
-              <a:rPr lang="en-US"/>
+              <a:rPr lang="en-GB"/>
               <a:t>Third level</a:t>
             </a:r>
           </a:p>
           <a:p>
             <a:pPr lvl="3"/>
             <a:r>
-              <a:rPr lang="en-US"/>
+              <a:rPr lang="en-GB"/>
               <a:t>Fourth level</a:t>
             </a:r>
           </a:p>
           <a:p>
             <a:pPr lvl="4"/>
             <a:r>
-              <a:rPr lang="en-US"/>
+              <a:rPr lang="en-GB"/>
               <a:t>Fifth level</a:t>
             </a:r>
+            <a:endParaRPr lang="en-US"/>
           </a:p>
         </p:txBody>
       </p:sp>
@@ -1731,7 +1747,7 @@
             <a:fld id="{1D8BD707-D9CF-40AE-B4C6-C98DA3205C09}" type="datetimeFigureOut">
               <a:rPr lang="en-US" smtClean="0"/>
               <a:pPr/>
-              <a:t>11/11/24</a:t>
+              <a:t>11/3/25</a:t>
             </a:fld>
             <a:endParaRPr lang="en-US"/>
           </a:p>
@@ -1781,6 +1797,467 @@
         </p:txBody>
       </p:sp>
     </p:spTree>
+    <p:extLst>
+      <p:ext uri="{BB962C8B-B14F-4D97-AF65-F5344CB8AC3E}">
+        <p14:creationId xmlns:p14="http://schemas.microsoft.com/office/powerpoint/2010/main" val="2256627450"/>
+      </p:ext>
+    </p:extLst>
+  </p:cSld>
+  <p:clrMapOvr>
+    <a:masterClrMapping/>
+  </p:clrMapOvr>
+</p:sldLayout>
+</file>
+
+<file path=ppt/slideLayouts/slideLayout12.xml><?xml version="1.0" encoding="utf-8"?>
+<p:sldLayout xmlns:a="http://schemas.openxmlformats.org/drawingml/2006/main" xmlns:r="http://schemas.openxmlformats.org/officeDocument/2006/relationships" xmlns:p="http://schemas.openxmlformats.org/presentationml/2006/main" type="tx">
+  <p:cSld name="Title &amp; Bullets">
+    <p:spTree>
+      <p:nvGrpSpPr>
+        <p:cNvPr id="1" name=""/>
+        <p:cNvGrpSpPr/>
+        <p:nvPr/>
+      </p:nvGrpSpPr>
+      <p:grpSpPr>
+        <a:xfrm>
+          <a:off x="0" y="0"/>
+          <a:ext cx="0" cy="0"/>
+          <a:chOff x="0" y="0"/>
+          <a:chExt cx="0" cy="0"/>
+        </a:xfrm>
+      </p:grpSpPr>
+      <p:sp>
+        <p:nvSpPr>
+          <p:cNvPr id="22" name="Shape 22"/>
+          <p:cNvSpPr>
+            <a:spLocks noGrp="1"/>
+          </p:cNvSpPr>
+          <p:nvPr>
+            <p:ph type="title"/>
+          </p:nvPr>
+        </p:nvSpPr>
+        <p:spPr>
+          <a:prstGeom prst="rect">
+            <a:avLst/>
+          </a:prstGeom>
+        </p:spPr>
+        <p:txBody>
+          <a:bodyPr/>
+          <a:lstStyle/>
+          <a:p>
+            <a:r>
+              <a:rPr lang="en-GB"/>
+              <a:t>Click to edit Master title style</a:t>
+            </a:r>
+            <a:endParaRPr/>
+          </a:p>
+        </p:txBody>
+      </p:sp>
+      <p:sp>
+        <p:nvSpPr>
+          <p:cNvPr id="23" name="Shape 23"/>
+          <p:cNvSpPr>
+            <a:spLocks noGrp="1"/>
+          </p:cNvSpPr>
+          <p:nvPr>
+            <p:ph type="body" idx="1"/>
+          </p:nvPr>
+        </p:nvSpPr>
+        <p:spPr>
+          <a:prstGeom prst="rect">
+            <a:avLst/>
+          </a:prstGeom>
+        </p:spPr>
+        <p:txBody>
+          <a:bodyPr/>
+          <a:lstStyle/>
+          <a:p>
+            <a:pPr lvl="0"/>
+            <a:r>
+              <a:rPr lang="en-GB"/>
+              <a:t>Click to edit Master text styles</a:t>
+            </a:r>
+          </a:p>
+          <a:p>
+            <a:pPr lvl="1"/>
+            <a:r>
+              <a:rPr lang="en-GB"/>
+              <a:t>Second level</a:t>
+            </a:r>
+          </a:p>
+          <a:p>
+            <a:pPr lvl="2"/>
+            <a:r>
+              <a:rPr lang="en-GB"/>
+              <a:t>Third level</a:t>
+            </a:r>
+          </a:p>
+          <a:p>
+            <a:pPr lvl="3"/>
+            <a:r>
+              <a:rPr lang="en-GB"/>
+              <a:t>Fourth level</a:t>
+            </a:r>
+          </a:p>
+          <a:p>
+            <a:pPr lvl="4"/>
+            <a:r>
+              <a:rPr lang="en-GB"/>
+              <a:t>Fifth level</a:t>
+            </a:r>
+            <a:endParaRPr/>
+          </a:p>
+        </p:txBody>
+      </p:sp>
+      <p:sp>
+        <p:nvSpPr>
+          <p:cNvPr id="24" name="Shape 24"/>
+          <p:cNvSpPr>
+            <a:spLocks noGrp="1"/>
+          </p:cNvSpPr>
+          <p:nvPr>
+            <p:ph type="sldNum" sz="quarter" idx="2"/>
+          </p:nvPr>
+        </p:nvSpPr>
+        <p:spPr>
+          <a:prstGeom prst="rect">
+            <a:avLst/>
+          </a:prstGeom>
+        </p:spPr>
+        <p:txBody>
+          <a:bodyPr/>
+          <a:lstStyle/>
+          <a:p>
+            <a:fld id="{B6F15528-21DE-4FAA-801E-634DDDAF4B2B}" type="slidenum">
+              <a:rPr lang="en-US" smtClean="0"/>
+              <a:pPr/>
+              <a:t>‹#›</a:t>
+            </a:fld>
+            <a:endParaRPr lang="en-US"/>
+          </a:p>
+        </p:txBody>
+      </p:sp>
+    </p:spTree>
+    <p:extLst>
+      <p:ext uri="{BB962C8B-B14F-4D97-AF65-F5344CB8AC3E}">
+        <p14:creationId xmlns:p14="http://schemas.microsoft.com/office/powerpoint/2010/main" val="4162203307"/>
+      </p:ext>
+    </p:extLst>
+  </p:cSld>
+  <p:clrMapOvr>
+    <a:masterClrMapping/>
+  </p:clrMapOvr>
+</p:sldLayout>
+</file>
+
+<file path=ppt/slideLayouts/slideLayout13.xml><?xml version="1.0" encoding="utf-8"?>
+<p:sldLayout xmlns:a="http://schemas.openxmlformats.org/drawingml/2006/main" xmlns:r="http://schemas.openxmlformats.org/officeDocument/2006/relationships" xmlns:p="http://schemas.openxmlformats.org/presentationml/2006/main" showMasterSp="0">
+  <p:cSld name="1_Title Slide">
+    <p:spTree>
+      <p:nvGrpSpPr>
+        <p:cNvPr id="1" name=""/>
+        <p:cNvGrpSpPr/>
+        <p:nvPr/>
+      </p:nvGrpSpPr>
+      <p:grpSpPr>
+        <a:xfrm>
+          <a:off x="0" y="0"/>
+          <a:ext cx="0" cy="0"/>
+          <a:chOff x="0" y="0"/>
+          <a:chExt cx="0" cy="0"/>
+        </a:xfrm>
+      </p:grpSpPr>
+      <p:sp>
+        <p:nvSpPr>
+          <p:cNvPr id="15" name="Title Text"/>
+          <p:cNvSpPr txBox="1">
+            <a:spLocks noGrp="1"/>
+          </p:cNvSpPr>
+          <p:nvPr>
+            <p:ph type="title"/>
+          </p:nvPr>
+        </p:nvSpPr>
+        <p:spPr>
+          <a:xfrm>
+            <a:off x="863600" y="2286000"/>
+            <a:ext cx="10464801" cy="1143001"/>
+          </a:xfrm>
+          <a:prstGeom prst="rect">
+            <a:avLst/>
+          </a:prstGeom>
+        </p:spPr>
+        <p:txBody>
+          <a:bodyPr/>
+          <a:lstStyle/>
+          <a:p>
+            <a:r>
+              <a:rPr lang="en-GB"/>
+              <a:t>Click to edit Master title style</a:t>
+            </a:r>
+            <a:endParaRPr dirty="0"/>
+          </a:p>
+        </p:txBody>
+      </p:sp>
+      <p:sp>
+        <p:nvSpPr>
+          <p:cNvPr id="16" name="Subtitle"/>
+          <p:cNvSpPr txBox="1">
+            <a:spLocks noGrp="1"/>
+          </p:cNvSpPr>
+          <p:nvPr>
+            <p:ph type="body" sz="quarter" idx="22"/>
+          </p:nvPr>
+        </p:nvSpPr>
+        <p:spPr>
+          <a:xfrm>
+            <a:off x="957115" y="3465604"/>
+            <a:ext cx="10134430" cy="846384"/>
+          </a:xfrm>
+          <a:prstGeom prst="rect">
+            <a:avLst/>
+          </a:prstGeom>
+        </p:spPr>
+        <p:txBody>
+          <a:bodyPr anchor="ctr">
+            <a:spAutoFit/>
+          </a:bodyPr>
+          <a:lstStyle>
+            <a:lvl1pPr marL="0" indent="0" algn="ctr">
+              <a:spcBef>
+                <a:spcPts val="0"/>
+              </a:spcBef>
+              <a:buClrTx/>
+              <a:buSzTx/>
+              <a:buFontTx/>
+              <a:buNone/>
+              <a:defRPr>
+                <a:solidFill>
+                  <a:srgbClr val="2F4468"/>
+                </a:solidFill>
+              </a:defRPr>
+            </a:lvl1pPr>
+          </a:lstStyle>
+          <a:p>
+            <a:pPr lvl="0"/>
+            <a:r>
+              <a:rPr lang="en-GB"/>
+              <a:t>Click to edit Master text styles</a:t>
+            </a:r>
+          </a:p>
+        </p:txBody>
+      </p:sp>
+      <p:sp>
+        <p:nvSpPr>
+          <p:cNvPr id="17" name="Slide Number"/>
+          <p:cNvSpPr txBox="1">
+            <a:spLocks noGrp="1"/>
+          </p:cNvSpPr>
+          <p:nvPr>
+            <p:ph type="sldNum" sz="quarter" idx="2"/>
+          </p:nvPr>
+        </p:nvSpPr>
+        <p:spPr>
+          <a:xfrm>
+            <a:off x="11091544" y="6360984"/>
+            <a:ext cx="495649" cy="492440"/>
+          </a:xfrm>
+          <a:prstGeom prst="rect">
+            <a:avLst/>
+          </a:prstGeom>
+        </p:spPr>
+        <p:txBody>
+          <a:bodyPr/>
+          <a:lstStyle>
+            <a:lvl1pPr>
+              <a:defRPr sz="2000"/>
+            </a:lvl1pPr>
+          </a:lstStyle>
+          <a:p>
+            <a:fld id="{B6F15528-21DE-4FAA-801E-634DDDAF4B2B}" type="slidenum">
+              <a:rPr lang="en-US" smtClean="0"/>
+              <a:pPr/>
+              <a:t>‹#›</a:t>
+            </a:fld>
+            <a:endParaRPr lang="en-US"/>
+          </a:p>
+        </p:txBody>
+      </p:sp>
+    </p:spTree>
+    <p:extLst>
+      <p:ext uri="{BB962C8B-B14F-4D97-AF65-F5344CB8AC3E}">
+        <p14:creationId xmlns:p14="http://schemas.microsoft.com/office/powerpoint/2010/main" val="958222344"/>
+      </p:ext>
+    </p:extLst>
+  </p:cSld>
+  <p:clrMapOvr>
+    <a:masterClrMapping/>
+  </p:clrMapOvr>
+  <p:transition spd="med"/>
+</p:sldLayout>
+</file>
+
+<file path=ppt/slideLayouts/slideLayout14.xml><?xml version="1.0" encoding="utf-8"?>
+<p:sldLayout xmlns:a="http://schemas.openxmlformats.org/drawingml/2006/main" xmlns:r="http://schemas.openxmlformats.org/officeDocument/2006/relationships" xmlns:p="http://schemas.openxmlformats.org/presentationml/2006/main" type="txAndChart">
+  <p:cSld name="Title, Text and Chart">
+    <p:spTree>
+      <p:nvGrpSpPr>
+        <p:cNvPr id="1" name=""/>
+        <p:cNvGrpSpPr/>
+        <p:nvPr/>
+      </p:nvGrpSpPr>
+      <p:grpSpPr>
+        <a:xfrm>
+          <a:off x="0" y="0"/>
+          <a:ext cx="0" cy="0"/>
+          <a:chOff x="0" y="0"/>
+          <a:chExt cx="0" cy="0"/>
+        </a:xfrm>
+      </p:grpSpPr>
+      <p:sp>
+        <p:nvSpPr>
+          <p:cNvPr id="2" name="Title 1"/>
+          <p:cNvSpPr>
+            <a:spLocks noGrp="1"/>
+          </p:cNvSpPr>
+          <p:nvPr>
+            <p:ph type="title"/>
+          </p:nvPr>
+        </p:nvSpPr>
+        <p:spPr>
+          <a:xfrm>
+            <a:off x="1320800" y="381000"/>
+            <a:ext cx="10363200" cy="1143000"/>
+          </a:xfrm>
+        </p:spPr>
+        <p:txBody>
+          <a:bodyPr/>
+          <a:lstStyle/>
+          <a:p>
+            <a:r>
+              <a:rPr lang="en-GB"/>
+              <a:t>Click to edit Master title style</a:t>
+            </a:r>
+            <a:endParaRPr lang="en-US"/>
+          </a:p>
+        </p:txBody>
+      </p:sp>
+      <p:sp>
+        <p:nvSpPr>
+          <p:cNvPr id="3" name="Text Placeholder 2"/>
+          <p:cNvSpPr>
+            <a:spLocks noGrp="1"/>
+          </p:cNvSpPr>
+          <p:nvPr>
+            <p:ph type="body" sz="half" idx="1"/>
+          </p:nvPr>
+        </p:nvSpPr>
+        <p:spPr>
+          <a:xfrm>
+            <a:off x="1625600" y="1828800"/>
+            <a:ext cx="4876800" cy="4267200"/>
+          </a:xfrm>
+        </p:spPr>
+        <p:txBody>
+          <a:bodyPr/>
+          <a:lstStyle/>
+          <a:p>
+            <a:pPr lvl="0"/>
+            <a:r>
+              <a:rPr lang="en-GB"/>
+              <a:t>Click to edit Master text styles</a:t>
+            </a:r>
+          </a:p>
+          <a:p>
+            <a:pPr lvl="1"/>
+            <a:r>
+              <a:rPr lang="en-GB"/>
+              <a:t>Second level</a:t>
+            </a:r>
+          </a:p>
+          <a:p>
+            <a:pPr lvl="2"/>
+            <a:r>
+              <a:rPr lang="en-GB"/>
+              <a:t>Third level</a:t>
+            </a:r>
+          </a:p>
+          <a:p>
+            <a:pPr lvl="3"/>
+            <a:r>
+              <a:rPr lang="en-GB"/>
+              <a:t>Fourth level</a:t>
+            </a:r>
+          </a:p>
+          <a:p>
+            <a:pPr lvl="4"/>
+            <a:r>
+              <a:rPr lang="en-GB"/>
+              <a:t>Fifth level</a:t>
+            </a:r>
+            <a:endParaRPr lang="en-US"/>
+          </a:p>
+        </p:txBody>
+      </p:sp>
+      <p:sp>
+        <p:nvSpPr>
+          <p:cNvPr id="4" name="Chart Placeholder 3"/>
+          <p:cNvSpPr>
+            <a:spLocks noGrp="1"/>
+          </p:cNvSpPr>
+          <p:nvPr>
+            <p:ph type="chart" sz="half" idx="2"/>
+          </p:nvPr>
+        </p:nvSpPr>
+        <p:spPr>
+          <a:xfrm>
+            <a:off x="6705600" y="1828800"/>
+            <a:ext cx="4876800" cy="4267200"/>
+          </a:xfrm>
+        </p:spPr>
+        <p:txBody>
+          <a:bodyPr/>
+          <a:lstStyle/>
+          <a:p>
+            <a:pPr lvl="0"/>
+            <a:r>
+              <a:rPr lang="en-GB" noProof="0"/>
+              <a:t>Click icon to add chart</a:t>
+            </a:r>
+            <a:endParaRPr lang="en-US" noProof="0"/>
+          </a:p>
+        </p:txBody>
+      </p:sp>
+      <p:sp>
+        <p:nvSpPr>
+          <p:cNvPr id="5" name="Rectangle 1028"/>
+          <p:cNvSpPr>
+            <a:spLocks noGrp="1" noChangeArrowheads="1"/>
+          </p:cNvSpPr>
+          <p:nvPr>
+            <p:ph type="ftr" sz="quarter" idx="10"/>
+          </p:nvPr>
+        </p:nvSpPr>
+        <p:spPr>
+          <a:ln/>
+        </p:spPr>
+        <p:txBody>
+          <a:bodyPr/>
+          <a:lstStyle>
+            <a:lvl1pPr>
+              <a:defRPr/>
+            </a:lvl1pPr>
+          </a:lstStyle>
+          <a:p>
+            <a:endParaRPr lang="en-US"/>
+          </a:p>
+        </p:txBody>
+      </p:sp>
+    </p:spTree>
+    <p:extLst>
+      <p:ext uri="{BB962C8B-B14F-4D97-AF65-F5344CB8AC3E}">
+        <p14:creationId xmlns:p14="http://schemas.microsoft.com/office/powerpoint/2010/main" val="3106233949"/>
+      </p:ext>
+    </p:extLst>
   </p:cSld>
   <p:clrMapOvr>
     <a:masterClrMapping/>
@@ -1832,9 +2309,10 @@
           </a:lstStyle>
           <a:p>
             <a:r>
-              <a:rPr lang="en-US" dirty="0"/>
+              <a:rPr lang="en-GB"/>
               <a:t>Click to edit Master title style</a:t>
             </a:r>
+            <a:endParaRPr lang="en-US" dirty="0"/>
           </a:p>
         </p:txBody>
       </p:sp>
@@ -1855,37 +2333,38 @@
           <a:p>
             <a:pPr lvl="0"/>
             <a:r>
-              <a:rPr lang="en-US"/>
+              <a:rPr lang="en-GB"/>
               <a:t>Click to edit Master text styles</a:t>
             </a:r>
           </a:p>
           <a:p>
             <a:pPr lvl="1"/>
             <a:r>
-              <a:rPr lang="en-US"/>
+              <a:rPr lang="en-GB"/>
               <a:t>Second level</a:t>
             </a:r>
           </a:p>
           <a:p>
             <a:pPr lvl="2"/>
             <a:r>
-              <a:rPr lang="en-US"/>
+              <a:rPr lang="en-GB"/>
               <a:t>Third level</a:t>
             </a:r>
           </a:p>
           <a:p>
             <a:pPr lvl="3"/>
             <a:r>
-              <a:rPr lang="en-US"/>
+              <a:rPr lang="en-GB"/>
               <a:t>Fourth level</a:t>
             </a:r>
           </a:p>
           <a:p>
             <a:pPr lvl="4"/>
             <a:r>
-              <a:rPr lang="en-US"/>
+              <a:rPr lang="en-GB"/>
               <a:t>Fifth level</a:t>
             </a:r>
+            <a:endParaRPr lang="en-US"/>
           </a:p>
         </p:txBody>
       </p:sp>
@@ -1907,7 +2386,7 @@
             <a:fld id="{1D8BD707-D9CF-40AE-B4C6-C98DA3205C09}" type="datetimeFigureOut">
               <a:rPr lang="en-US" smtClean="0"/>
               <a:pPr/>
-              <a:t>11/11/24</a:t>
+              <a:t>11/3/25</a:t>
             </a:fld>
             <a:endParaRPr lang="en-US"/>
           </a:p>
@@ -1960,7 +2439,7 @@
         <p:nvCxnSpPr>
           <p:cNvPr id="7" name="Straight Connector 6"/>
           <p:cNvCxnSpPr/>
-          <p:nvPr userDrawn="1"/>
+          <p:nvPr/>
         </p:nvCxnSpPr>
         <p:spPr>
           <a:xfrm>
@@ -1994,7 +2473,276 @@
           </a:fontRef>
         </p:style>
       </p:cxnSp>
+      <p:cxnSp>
+        <p:nvCxnSpPr>
+          <p:cNvPr id="8" name="Straight Connector 7">
+            <a:extLst>
+              <a:ext uri="{FF2B5EF4-FFF2-40B4-BE49-F238E27FC236}">
+                <a16:creationId xmlns:a16="http://schemas.microsoft.com/office/drawing/2014/main" id="{A54FA624-7CFC-3CFB-8384-E3FA99B20E94}"/>
+              </a:ext>
+            </a:extLst>
+          </p:cNvPr>
+          <p:cNvCxnSpPr/>
+          <p:nvPr/>
+        </p:nvCxnSpPr>
+        <p:spPr>
+          <a:xfrm>
+            <a:off x="609600" y="1447800"/>
+            <a:ext cx="11074400" cy="0"/>
+          </a:xfrm>
+          <a:prstGeom prst="line">
+            <a:avLst/>
+          </a:prstGeom>
+          <a:ln w="12700">
+            <a:solidFill>
+              <a:schemeClr val="tx1">
+                <a:lumMod val="50000"/>
+                <a:lumOff val="50000"/>
+              </a:schemeClr>
+            </a:solidFill>
+          </a:ln>
+        </p:spPr>
+        <p:style>
+          <a:lnRef idx="1">
+            <a:schemeClr val="accent1"/>
+          </a:lnRef>
+          <a:fillRef idx="0">
+            <a:schemeClr val="accent1"/>
+          </a:fillRef>
+          <a:effectRef idx="0">
+            <a:schemeClr val="accent1"/>
+          </a:effectRef>
+          <a:fontRef idx="minor">
+            <a:schemeClr val="tx1"/>
+          </a:fontRef>
+        </p:style>
+      </p:cxnSp>
+      <p:cxnSp>
+        <p:nvCxnSpPr>
+          <p:cNvPr id="9" name="Straight Connector 8">
+            <a:extLst>
+              <a:ext uri="{FF2B5EF4-FFF2-40B4-BE49-F238E27FC236}">
+                <a16:creationId xmlns:a16="http://schemas.microsoft.com/office/drawing/2014/main" id="{9C51F014-A304-3672-EB37-723E4843A104}"/>
+              </a:ext>
+            </a:extLst>
+          </p:cNvPr>
+          <p:cNvCxnSpPr/>
+          <p:nvPr/>
+        </p:nvCxnSpPr>
+        <p:spPr>
+          <a:xfrm>
+            <a:off x="609600" y="1447800"/>
+            <a:ext cx="11074400" cy="0"/>
+          </a:xfrm>
+          <a:prstGeom prst="line">
+            <a:avLst/>
+          </a:prstGeom>
+          <a:ln w="12700">
+            <a:solidFill>
+              <a:schemeClr val="tx1">
+                <a:lumMod val="50000"/>
+                <a:lumOff val="50000"/>
+              </a:schemeClr>
+            </a:solidFill>
+          </a:ln>
+        </p:spPr>
+        <p:style>
+          <a:lnRef idx="1">
+            <a:schemeClr val="accent1"/>
+          </a:lnRef>
+          <a:fillRef idx="0">
+            <a:schemeClr val="accent1"/>
+          </a:fillRef>
+          <a:effectRef idx="0">
+            <a:schemeClr val="accent1"/>
+          </a:effectRef>
+          <a:fontRef idx="minor">
+            <a:schemeClr val="tx1"/>
+          </a:fontRef>
+        </p:style>
+      </p:cxnSp>
+      <p:cxnSp>
+        <p:nvCxnSpPr>
+          <p:cNvPr id="10" name="Straight Connector 9">
+            <a:extLst>
+              <a:ext uri="{FF2B5EF4-FFF2-40B4-BE49-F238E27FC236}">
+                <a16:creationId xmlns:a16="http://schemas.microsoft.com/office/drawing/2014/main" id="{FDAB13D9-B7A5-0614-4651-2F9977D91910}"/>
+              </a:ext>
+            </a:extLst>
+          </p:cNvPr>
+          <p:cNvCxnSpPr/>
+          <p:nvPr/>
+        </p:nvCxnSpPr>
+        <p:spPr>
+          <a:xfrm>
+            <a:off x="609600" y="1447800"/>
+            <a:ext cx="11074400" cy="0"/>
+          </a:xfrm>
+          <a:prstGeom prst="line">
+            <a:avLst/>
+          </a:prstGeom>
+          <a:ln w="12700">
+            <a:solidFill>
+              <a:schemeClr val="tx1">
+                <a:lumMod val="50000"/>
+                <a:lumOff val="50000"/>
+              </a:schemeClr>
+            </a:solidFill>
+          </a:ln>
+        </p:spPr>
+        <p:style>
+          <a:lnRef idx="1">
+            <a:schemeClr val="accent1"/>
+          </a:lnRef>
+          <a:fillRef idx="0">
+            <a:schemeClr val="accent1"/>
+          </a:fillRef>
+          <a:effectRef idx="0">
+            <a:schemeClr val="accent1"/>
+          </a:effectRef>
+          <a:fontRef idx="minor">
+            <a:schemeClr val="tx1"/>
+          </a:fontRef>
+        </p:style>
+      </p:cxnSp>
+      <p:cxnSp>
+        <p:nvCxnSpPr>
+          <p:cNvPr id="11" name="Straight Connector 10">
+            <a:extLst>
+              <a:ext uri="{FF2B5EF4-FFF2-40B4-BE49-F238E27FC236}">
+                <a16:creationId xmlns:a16="http://schemas.microsoft.com/office/drawing/2014/main" id="{35B6F98E-998E-0C49-19D0-BD928FADEDE0}"/>
+              </a:ext>
+            </a:extLst>
+          </p:cNvPr>
+          <p:cNvCxnSpPr/>
+          <p:nvPr/>
+        </p:nvCxnSpPr>
+        <p:spPr>
+          <a:xfrm>
+            <a:off x="609600" y="1447800"/>
+            <a:ext cx="11074400" cy="0"/>
+          </a:xfrm>
+          <a:prstGeom prst="line">
+            <a:avLst/>
+          </a:prstGeom>
+          <a:ln w="12700">
+            <a:solidFill>
+              <a:schemeClr val="tx1">
+                <a:lumMod val="50000"/>
+                <a:lumOff val="50000"/>
+              </a:schemeClr>
+            </a:solidFill>
+          </a:ln>
+        </p:spPr>
+        <p:style>
+          <a:lnRef idx="1">
+            <a:schemeClr val="accent1"/>
+          </a:lnRef>
+          <a:fillRef idx="0">
+            <a:schemeClr val="accent1"/>
+          </a:fillRef>
+          <a:effectRef idx="0">
+            <a:schemeClr val="accent1"/>
+          </a:effectRef>
+          <a:fontRef idx="minor">
+            <a:schemeClr val="tx1"/>
+          </a:fontRef>
+        </p:style>
+      </p:cxnSp>
+      <p:cxnSp>
+        <p:nvCxnSpPr>
+          <p:cNvPr id="12" name="Straight Connector 11">
+            <a:extLst>
+              <a:ext uri="{FF2B5EF4-FFF2-40B4-BE49-F238E27FC236}">
+                <a16:creationId xmlns:a16="http://schemas.microsoft.com/office/drawing/2014/main" id="{6A350EAD-DC44-A3A0-38C6-89949173DFA9}"/>
+              </a:ext>
+            </a:extLst>
+          </p:cNvPr>
+          <p:cNvCxnSpPr/>
+          <p:nvPr/>
+        </p:nvCxnSpPr>
+        <p:spPr>
+          <a:xfrm>
+            <a:off x="609600" y="1447800"/>
+            <a:ext cx="11074400" cy="0"/>
+          </a:xfrm>
+          <a:prstGeom prst="line">
+            <a:avLst/>
+          </a:prstGeom>
+          <a:ln w="12700">
+            <a:solidFill>
+              <a:schemeClr val="tx1">
+                <a:lumMod val="50000"/>
+                <a:lumOff val="50000"/>
+              </a:schemeClr>
+            </a:solidFill>
+          </a:ln>
+        </p:spPr>
+        <p:style>
+          <a:lnRef idx="1">
+            <a:schemeClr val="accent1"/>
+          </a:lnRef>
+          <a:fillRef idx="0">
+            <a:schemeClr val="accent1"/>
+          </a:fillRef>
+          <a:effectRef idx="0">
+            <a:schemeClr val="accent1"/>
+          </a:effectRef>
+          <a:fontRef idx="minor">
+            <a:schemeClr val="tx1"/>
+          </a:fontRef>
+        </p:style>
+      </p:cxnSp>
+      <p:cxnSp>
+        <p:nvCxnSpPr>
+          <p:cNvPr id="13" name="Straight Connector 12">
+            <a:extLst>
+              <a:ext uri="{FF2B5EF4-FFF2-40B4-BE49-F238E27FC236}">
+                <a16:creationId xmlns:a16="http://schemas.microsoft.com/office/drawing/2014/main" id="{6CA29CA4-0D75-B25E-E49E-22B124629880}"/>
+              </a:ext>
+            </a:extLst>
+          </p:cNvPr>
+          <p:cNvCxnSpPr/>
+          <p:nvPr userDrawn="1"/>
+        </p:nvCxnSpPr>
+        <p:spPr>
+          <a:xfrm>
+            <a:off x="609600" y="1447800"/>
+            <a:ext cx="11074400" cy="0"/>
+          </a:xfrm>
+          <a:prstGeom prst="line">
+            <a:avLst/>
+          </a:prstGeom>
+          <a:ln w="12700">
+            <a:solidFill>
+              <a:schemeClr val="tx1">
+                <a:lumMod val="50000"/>
+                <a:lumOff val="50000"/>
+              </a:schemeClr>
+            </a:solidFill>
+          </a:ln>
+        </p:spPr>
+        <p:style>
+          <a:lnRef idx="1">
+            <a:schemeClr val="accent1"/>
+          </a:lnRef>
+          <a:fillRef idx="0">
+            <a:schemeClr val="accent1"/>
+          </a:fillRef>
+          <a:effectRef idx="0">
+            <a:schemeClr val="accent1"/>
+          </a:effectRef>
+          <a:fontRef idx="minor">
+            <a:schemeClr val="tx1"/>
+          </a:fontRef>
+        </p:style>
+      </p:cxnSp>
     </p:spTree>
+    <p:extLst>
+      <p:ext uri="{BB962C8B-B14F-4D97-AF65-F5344CB8AC3E}">
+        <p14:creationId xmlns:p14="http://schemas.microsoft.com/office/powerpoint/2010/main" val="793809748"/>
+      </p:ext>
+    </p:extLst>
   </p:cSld>
   <p:clrMapOvr>
     <a:masterClrMapping/>
@@ -2044,9 +2792,10 @@
           </a:lstStyle>
           <a:p>
             <a:r>
-              <a:rPr lang="en-US"/>
+              <a:rPr lang="en-GB"/>
               <a:t>Click to edit Master title style</a:t>
             </a:r>
+            <a:endParaRPr lang="en-US"/>
           </a:p>
         </p:txBody>
       </p:sp>
@@ -2163,7 +2912,7 @@
           <a:p>
             <a:pPr lvl="0"/>
             <a:r>
-              <a:rPr lang="en-US"/>
+              <a:rPr lang="en-GB"/>
               <a:t>Click to edit Master text styles</a:t>
             </a:r>
           </a:p>
@@ -2187,7 +2936,7 @@
             <a:fld id="{1D8BD707-D9CF-40AE-B4C6-C98DA3205C09}" type="datetimeFigureOut">
               <a:rPr lang="en-US" smtClean="0"/>
               <a:pPr/>
-              <a:t>11/11/24</a:t>
+              <a:t>11/3/25</a:t>
             </a:fld>
             <a:endParaRPr lang="en-US"/>
           </a:p>
@@ -2237,6 +2986,11 @@
         </p:txBody>
       </p:sp>
     </p:spTree>
+    <p:extLst>
+      <p:ext uri="{BB962C8B-B14F-4D97-AF65-F5344CB8AC3E}">
+        <p14:creationId xmlns:p14="http://schemas.microsoft.com/office/powerpoint/2010/main" val="1549544369"/>
+      </p:ext>
+    </p:extLst>
   </p:cSld>
   <p:clrMapOvr>
     <a:masterClrMapping/>
@@ -2288,9 +3042,10 @@
           </a:lstStyle>
           <a:p>
             <a:r>
-              <a:rPr lang="en-US" dirty="0"/>
+              <a:rPr lang="en-GB"/>
               <a:t>Click to edit Master title style</a:t>
             </a:r>
+            <a:endParaRPr lang="en-US" dirty="0"/>
           </a:p>
         </p:txBody>
       </p:sp>
@@ -2344,37 +3099,38 @@
           <a:p>
             <a:pPr lvl="0"/>
             <a:r>
-              <a:rPr lang="en-US"/>
+              <a:rPr lang="en-GB"/>
               <a:t>Click to edit Master text styles</a:t>
             </a:r>
           </a:p>
           <a:p>
             <a:pPr lvl="1"/>
             <a:r>
-              <a:rPr lang="en-US"/>
+              <a:rPr lang="en-GB"/>
               <a:t>Second level</a:t>
             </a:r>
           </a:p>
           <a:p>
             <a:pPr lvl="2"/>
             <a:r>
-              <a:rPr lang="en-US"/>
+              <a:rPr lang="en-GB"/>
               <a:t>Third level</a:t>
             </a:r>
           </a:p>
           <a:p>
             <a:pPr lvl="3"/>
             <a:r>
-              <a:rPr lang="en-US"/>
+              <a:rPr lang="en-GB"/>
               <a:t>Fourth level</a:t>
             </a:r>
           </a:p>
           <a:p>
             <a:pPr lvl="4"/>
             <a:r>
-              <a:rPr lang="en-US"/>
+              <a:rPr lang="en-GB"/>
               <a:t>Fifth level</a:t>
             </a:r>
+            <a:endParaRPr lang="en-US"/>
           </a:p>
         </p:txBody>
       </p:sp>
@@ -2428,37 +3184,38 @@
           <a:p>
             <a:pPr lvl="0"/>
             <a:r>
-              <a:rPr lang="en-US"/>
+              <a:rPr lang="en-GB"/>
               <a:t>Click to edit Master text styles</a:t>
             </a:r>
           </a:p>
           <a:p>
             <a:pPr lvl="1"/>
             <a:r>
-              <a:rPr lang="en-US"/>
+              <a:rPr lang="en-GB"/>
               <a:t>Second level</a:t>
             </a:r>
           </a:p>
           <a:p>
             <a:pPr lvl="2"/>
             <a:r>
-              <a:rPr lang="en-US"/>
+              <a:rPr lang="en-GB"/>
               <a:t>Third level</a:t>
             </a:r>
           </a:p>
           <a:p>
             <a:pPr lvl="3"/>
             <a:r>
-              <a:rPr lang="en-US"/>
+              <a:rPr lang="en-GB"/>
               <a:t>Fourth level</a:t>
             </a:r>
           </a:p>
           <a:p>
             <a:pPr lvl="4"/>
             <a:r>
-              <a:rPr lang="en-US"/>
+              <a:rPr lang="en-GB"/>
               <a:t>Fifth level</a:t>
             </a:r>
+            <a:endParaRPr lang="en-US"/>
           </a:p>
         </p:txBody>
       </p:sp>
@@ -2480,7 +3237,7 @@
             <a:fld id="{1D8BD707-D9CF-40AE-B4C6-C98DA3205C09}" type="datetimeFigureOut">
               <a:rPr lang="en-US" smtClean="0"/>
               <a:pPr/>
-              <a:t>11/11/24</a:t>
+              <a:t>11/3/25</a:t>
             </a:fld>
             <a:endParaRPr lang="en-US"/>
           </a:p>
@@ -2533,7 +3290,7 @@
         <p:nvCxnSpPr>
           <p:cNvPr id="8" name="Straight Connector 7"/>
           <p:cNvCxnSpPr/>
-          <p:nvPr userDrawn="1"/>
+          <p:nvPr/>
         </p:nvCxnSpPr>
         <p:spPr>
           <a:xfrm>
@@ -2564,7 +3321,258 @@
           </a:fontRef>
         </p:style>
       </p:cxnSp>
+      <p:cxnSp>
+        <p:nvCxnSpPr>
+          <p:cNvPr id="9" name="Straight Connector 8">
+            <a:extLst>
+              <a:ext uri="{FF2B5EF4-FFF2-40B4-BE49-F238E27FC236}">
+                <a16:creationId xmlns:a16="http://schemas.microsoft.com/office/drawing/2014/main" id="{0F42A16B-6893-A143-E832-A99D7B6427B3}"/>
+              </a:ext>
+            </a:extLst>
+          </p:cNvPr>
+          <p:cNvCxnSpPr/>
+          <p:nvPr/>
+        </p:nvCxnSpPr>
+        <p:spPr>
+          <a:xfrm>
+            <a:off x="609600" y="1447800"/>
+            <a:ext cx="11074400" cy="0"/>
+          </a:xfrm>
+          <a:prstGeom prst="line">
+            <a:avLst/>
+          </a:prstGeom>
+          <a:ln w="12700">
+            <a:solidFill>
+              <a:schemeClr val="tx1"/>
+            </a:solidFill>
+          </a:ln>
+        </p:spPr>
+        <p:style>
+          <a:lnRef idx="1">
+            <a:schemeClr val="accent1"/>
+          </a:lnRef>
+          <a:fillRef idx="0">
+            <a:schemeClr val="accent1"/>
+          </a:fillRef>
+          <a:effectRef idx="0">
+            <a:schemeClr val="accent1"/>
+          </a:effectRef>
+          <a:fontRef idx="minor">
+            <a:schemeClr val="tx1"/>
+          </a:fontRef>
+        </p:style>
+      </p:cxnSp>
+      <p:cxnSp>
+        <p:nvCxnSpPr>
+          <p:cNvPr id="10" name="Straight Connector 9">
+            <a:extLst>
+              <a:ext uri="{FF2B5EF4-FFF2-40B4-BE49-F238E27FC236}">
+                <a16:creationId xmlns:a16="http://schemas.microsoft.com/office/drawing/2014/main" id="{9B64861E-C2E3-2C0F-0C43-CF6F042CC211}"/>
+              </a:ext>
+            </a:extLst>
+          </p:cNvPr>
+          <p:cNvCxnSpPr/>
+          <p:nvPr/>
+        </p:nvCxnSpPr>
+        <p:spPr>
+          <a:xfrm>
+            <a:off x="609600" y="1447800"/>
+            <a:ext cx="11074400" cy="0"/>
+          </a:xfrm>
+          <a:prstGeom prst="line">
+            <a:avLst/>
+          </a:prstGeom>
+          <a:ln w="12700">
+            <a:solidFill>
+              <a:schemeClr val="tx1"/>
+            </a:solidFill>
+          </a:ln>
+        </p:spPr>
+        <p:style>
+          <a:lnRef idx="1">
+            <a:schemeClr val="accent1"/>
+          </a:lnRef>
+          <a:fillRef idx="0">
+            <a:schemeClr val="accent1"/>
+          </a:fillRef>
+          <a:effectRef idx="0">
+            <a:schemeClr val="accent1"/>
+          </a:effectRef>
+          <a:fontRef idx="minor">
+            <a:schemeClr val="tx1"/>
+          </a:fontRef>
+        </p:style>
+      </p:cxnSp>
+      <p:cxnSp>
+        <p:nvCxnSpPr>
+          <p:cNvPr id="11" name="Straight Connector 10">
+            <a:extLst>
+              <a:ext uri="{FF2B5EF4-FFF2-40B4-BE49-F238E27FC236}">
+                <a16:creationId xmlns:a16="http://schemas.microsoft.com/office/drawing/2014/main" id="{2EE7CBAE-0172-1E89-E84D-992B77561804}"/>
+              </a:ext>
+            </a:extLst>
+          </p:cNvPr>
+          <p:cNvCxnSpPr/>
+          <p:nvPr/>
+        </p:nvCxnSpPr>
+        <p:spPr>
+          <a:xfrm>
+            <a:off x="609600" y="1447800"/>
+            <a:ext cx="11074400" cy="0"/>
+          </a:xfrm>
+          <a:prstGeom prst="line">
+            <a:avLst/>
+          </a:prstGeom>
+          <a:ln w="12700">
+            <a:solidFill>
+              <a:schemeClr val="tx1"/>
+            </a:solidFill>
+          </a:ln>
+        </p:spPr>
+        <p:style>
+          <a:lnRef idx="1">
+            <a:schemeClr val="accent1"/>
+          </a:lnRef>
+          <a:fillRef idx="0">
+            <a:schemeClr val="accent1"/>
+          </a:fillRef>
+          <a:effectRef idx="0">
+            <a:schemeClr val="accent1"/>
+          </a:effectRef>
+          <a:fontRef idx="minor">
+            <a:schemeClr val="tx1"/>
+          </a:fontRef>
+        </p:style>
+      </p:cxnSp>
+      <p:cxnSp>
+        <p:nvCxnSpPr>
+          <p:cNvPr id="12" name="Straight Connector 11">
+            <a:extLst>
+              <a:ext uri="{FF2B5EF4-FFF2-40B4-BE49-F238E27FC236}">
+                <a16:creationId xmlns:a16="http://schemas.microsoft.com/office/drawing/2014/main" id="{9C50A73E-1B0E-99B0-1273-3679BDBB1512}"/>
+              </a:ext>
+            </a:extLst>
+          </p:cNvPr>
+          <p:cNvCxnSpPr/>
+          <p:nvPr/>
+        </p:nvCxnSpPr>
+        <p:spPr>
+          <a:xfrm>
+            <a:off x="609600" y="1447800"/>
+            <a:ext cx="11074400" cy="0"/>
+          </a:xfrm>
+          <a:prstGeom prst="line">
+            <a:avLst/>
+          </a:prstGeom>
+          <a:ln w="12700">
+            <a:solidFill>
+              <a:schemeClr val="tx1"/>
+            </a:solidFill>
+          </a:ln>
+        </p:spPr>
+        <p:style>
+          <a:lnRef idx="1">
+            <a:schemeClr val="accent1"/>
+          </a:lnRef>
+          <a:fillRef idx="0">
+            <a:schemeClr val="accent1"/>
+          </a:fillRef>
+          <a:effectRef idx="0">
+            <a:schemeClr val="accent1"/>
+          </a:effectRef>
+          <a:fontRef idx="minor">
+            <a:schemeClr val="tx1"/>
+          </a:fontRef>
+        </p:style>
+      </p:cxnSp>
+      <p:cxnSp>
+        <p:nvCxnSpPr>
+          <p:cNvPr id="13" name="Straight Connector 12">
+            <a:extLst>
+              <a:ext uri="{FF2B5EF4-FFF2-40B4-BE49-F238E27FC236}">
+                <a16:creationId xmlns:a16="http://schemas.microsoft.com/office/drawing/2014/main" id="{54674E79-66F0-A4C7-FF39-5F928B7C9A5B}"/>
+              </a:ext>
+            </a:extLst>
+          </p:cNvPr>
+          <p:cNvCxnSpPr/>
+          <p:nvPr/>
+        </p:nvCxnSpPr>
+        <p:spPr>
+          <a:xfrm>
+            <a:off x="609600" y="1447800"/>
+            <a:ext cx="11074400" cy="0"/>
+          </a:xfrm>
+          <a:prstGeom prst="line">
+            <a:avLst/>
+          </a:prstGeom>
+          <a:ln w="12700">
+            <a:solidFill>
+              <a:schemeClr val="tx1"/>
+            </a:solidFill>
+          </a:ln>
+        </p:spPr>
+        <p:style>
+          <a:lnRef idx="1">
+            <a:schemeClr val="accent1"/>
+          </a:lnRef>
+          <a:fillRef idx="0">
+            <a:schemeClr val="accent1"/>
+          </a:fillRef>
+          <a:effectRef idx="0">
+            <a:schemeClr val="accent1"/>
+          </a:effectRef>
+          <a:fontRef idx="minor">
+            <a:schemeClr val="tx1"/>
+          </a:fontRef>
+        </p:style>
+      </p:cxnSp>
+      <p:cxnSp>
+        <p:nvCxnSpPr>
+          <p:cNvPr id="14" name="Straight Connector 13">
+            <a:extLst>
+              <a:ext uri="{FF2B5EF4-FFF2-40B4-BE49-F238E27FC236}">
+                <a16:creationId xmlns:a16="http://schemas.microsoft.com/office/drawing/2014/main" id="{88FA33F7-BD25-8F44-1DDF-3807C3A6A002}"/>
+              </a:ext>
+            </a:extLst>
+          </p:cNvPr>
+          <p:cNvCxnSpPr/>
+          <p:nvPr userDrawn="1"/>
+        </p:nvCxnSpPr>
+        <p:spPr>
+          <a:xfrm>
+            <a:off x="609600" y="1447800"/>
+            <a:ext cx="11074400" cy="0"/>
+          </a:xfrm>
+          <a:prstGeom prst="line">
+            <a:avLst/>
+          </a:prstGeom>
+          <a:ln w="12700">
+            <a:solidFill>
+              <a:schemeClr val="tx1"/>
+            </a:solidFill>
+          </a:ln>
+        </p:spPr>
+        <p:style>
+          <a:lnRef idx="1">
+            <a:schemeClr val="accent1"/>
+          </a:lnRef>
+          <a:fillRef idx="0">
+            <a:schemeClr val="accent1"/>
+          </a:fillRef>
+          <a:effectRef idx="0">
+            <a:schemeClr val="accent1"/>
+          </a:effectRef>
+          <a:fontRef idx="minor">
+            <a:schemeClr val="tx1"/>
+          </a:fontRef>
+        </p:style>
+      </p:cxnSp>
     </p:spTree>
+    <p:extLst>
+      <p:ext uri="{BB962C8B-B14F-4D97-AF65-F5344CB8AC3E}">
+        <p14:creationId xmlns:p14="http://schemas.microsoft.com/office/powerpoint/2010/main" val="770997109"/>
+      </p:ext>
+    </p:extLst>
   </p:cSld>
   <p:clrMapOvr>
     <a:masterClrMapping/>
@@ -2616,9 +3624,10 @@
           </a:lstStyle>
           <a:p>
             <a:r>
-              <a:rPr lang="en-US" dirty="0"/>
+              <a:rPr lang="en-GB"/>
               <a:t>Click to edit Master title style</a:t>
             </a:r>
+            <a:endParaRPr lang="en-US" dirty="0"/>
           </a:p>
         </p:txBody>
       </p:sp>
@@ -2681,7 +3690,7 @@
           <a:p>
             <a:pPr lvl="0"/>
             <a:r>
-              <a:rPr lang="en-US"/>
+              <a:rPr lang="en-GB"/>
               <a:t>Click to edit Master text styles</a:t>
             </a:r>
           </a:p>
@@ -2737,37 +3746,38 @@
           <a:p>
             <a:pPr lvl="0"/>
             <a:r>
-              <a:rPr lang="en-US"/>
+              <a:rPr lang="en-GB"/>
               <a:t>Click to edit Master text styles</a:t>
             </a:r>
           </a:p>
           <a:p>
             <a:pPr lvl="1"/>
             <a:r>
-              <a:rPr lang="en-US"/>
+              <a:rPr lang="en-GB"/>
               <a:t>Second level</a:t>
             </a:r>
           </a:p>
           <a:p>
             <a:pPr lvl="2"/>
             <a:r>
-              <a:rPr lang="en-US"/>
+              <a:rPr lang="en-GB"/>
               <a:t>Third level</a:t>
             </a:r>
           </a:p>
           <a:p>
             <a:pPr lvl="3"/>
             <a:r>
-              <a:rPr lang="en-US"/>
+              <a:rPr lang="en-GB"/>
               <a:t>Fourth level</a:t>
             </a:r>
           </a:p>
           <a:p>
             <a:pPr lvl="4"/>
             <a:r>
-              <a:rPr lang="en-US"/>
+              <a:rPr lang="en-GB"/>
               <a:t>Fifth level</a:t>
             </a:r>
+            <a:endParaRPr lang="en-US"/>
           </a:p>
         </p:txBody>
       </p:sp>
@@ -2830,7 +3840,7 @@
           <a:p>
             <a:pPr lvl="0"/>
             <a:r>
-              <a:rPr lang="en-US"/>
+              <a:rPr lang="en-GB"/>
               <a:t>Click to edit Master text styles</a:t>
             </a:r>
           </a:p>
@@ -2886,37 +3896,38 @@
           <a:p>
             <a:pPr lvl="0"/>
             <a:r>
-              <a:rPr lang="en-US"/>
+              <a:rPr lang="en-GB"/>
               <a:t>Click to edit Master text styles</a:t>
             </a:r>
           </a:p>
           <a:p>
             <a:pPr lvl="1"/>
             <a:r>
-              <a:rPr lang="en-US"/>
+              <a:rPr lang="en-GB"/>
               <a:t>Second level</a:t>
             </a:r>
           </a:p>
           <a:p>
             <a:pPr lvl="2"/>
             <a:r>
-              <a:rPr lang="en-US"/>
+              <a:rPr lang="en-GB"/>
               <a:t>Third level</a:t>
             </a:r>
           </a:p>
           <a:p>
             <a:pPr lvl="3"/>
             <a:r>
-              <a:rPr lang="en-US"/>
+              <a:rPr lang="en-GB"/>
               <a:t>Fourth level</a:t>
             </a:r>
           </a:p>
           <a:p>
             <a:pPr lvl="4"/>
             <a:r>
-              <a:rPr lang="en-US"/>
+              <a:rPr lang="en-GB"/>
               <a:t>Fifth level</a:t>
             </a:r>
+            <a:endParaRPr lang="en-US"/>
           </a:p>
         </p:txBody>
       </p:sp>
@@ -2938,7 +3949,7 @@
             <a:fld id="{1D8BD707-D9CF-40AE-B4C6-C98DA3205C09}" type="datetimeFigureOut">
               <a:rPr lang="en-US" smtClean="0"/>
               <a:pPr/>
-              <a:t>11/11/24</a:t>
+              <a:t>11/3/25</a:t>
             </a:fld>
             <a:endParaRPr lang="en-US"/>
           </a:p>
@@ -2991,7 +4002,7 @@
         <p:nvCxnSpPr>
           <p:cNvPr id="10" name="Straight Connector 9"/>
           <p:cNvCxnSpPr/>
-          <p:nvPr userDrawn="1"/>
+          <p:nvPr/>
         </p:nvCxnSpPr>
         <p:spPr>
           <a:xfrm>
@@ -3022,7 +4033,217 @@
           </a:fontRef>
         </p:style>
       </p:cxnSp>
+      <p:cxnSp>
+        <p:nvCxnSpPr>
+          <p:cNvPr id="11" name="Straight Connector 10">
+            <a:extLst>
+              <a:ext uri="{FF2B5EF4-FFF2-40B4-BE49-F238E27FC236}">
+                <a16:creationId xmlns:a16="http://schemas.microsoft.com/office/drawing/2014/main" id="{F3436290-11E2-F20B-966B-F18296CC48D7}"/>
+              </a:ext>
+            </a:extLst>
+          </p:cNvPr>
+          <p:cNvCxnSpPr/>
+          <p:nvPr/>
+        </p:nvCxnSpPr>
+        <p:spPr>
+          <a:xfrm>
+            <a:off x="609600" y="1447800"/>
+            <a:ext cx="11074400" cy="0"/>
+          </a:xfrm>
+          <a:prstGeom prst="line">
+            <a:avLst/>
+          </a:prstGeom>
+          <a:ln w="12700">
+            <a:solidFill>
+              <a:schemeClr val="tx1"/>
+            </a:solidFill>
+          </a:ln>
+        </p:spPr>
+        <p:style>
+          <a:lnRef idx="1">
+            <a:schemeClr val="accent1"/>
+          </a:lnRef>
+          <a:fillRef idx="0">
+            <a:schemeClr val="accent1"/>
+          </a:fillRef>
+          <a:effectRef idx="0">
+            <a:schemeClr val="accent1"/>
+          </a:effectRef>
+          <a:fontRef idx="minor">
+            <a:schemeClr val="tx1"/>
+          </a:fontRef>
+        </p:style>
+      </p:cxnSp>
+      <p:cxnSp>
+        <p:nvCxnSpPr>
+          <p:cNvPr id="12" name="Straight Connector 11">
+            <a:extLst>
+              <a:ext uri="{FF2B5EF4-FFF2-40B4-BE49-F238E27FC236}">
+                <a16:creationId xmlns:a16="http://schemas.microsoft.com/office/drawing/2014/main" id="{A92CD0C1-F3B9-C92E-D990-6E9A57623D5A}"/>
+              </a:ext>
+            </a:extLst>
+          </p:cNvPr>
+          <p:cNvCxnSpPr/>
+          <p:nvPr/>
+        </p:nvCxnSpPr>
+        <p:spPr>
+          <a:xfrm>
+            <a:off x="609600" y="1447800"/>
+            <a:ext cx="11074400" cy="0"/>
+          </a:xfrm>
+          <a:prstGeom prst="line">
+            <a:avLst/>
+          </a:prstGeom>
+          <a:ln w="12700">
+            <a:solidFill>
+              <a:schemeClr val="tx1"/>
+            </a:solidFill>
+          </a:ln>
+        </p:spPr>
+        <p:style>
+          <a:lnRef idx="1">
+            <a:schemeClr val="accent1"/>
+          </a:lnRef>
+          <a:fillRef idx="0">
+            <a:schemeClr val="accent1"/>
+          </a:fillRef>
+          <a:effectRef idx="0">
+            <a:schemeClr val="accent1"/>
+          </a:effectRef>
+          <a:fontRef idx="minor">
+            <a:schemeClr val="tx1"/>
+          </a:fontRef>
+        </p:style>
+      </p:cxnSp>
+      <p:cxnSp>
+        <p:nvCxnSpPr>
+          <p:cNvPr id="13" name="Straight Connector 12">
+            <a:extLst>
+              <a:ext uri="{FF2B5EF4-FFF2-40B4-BE49-F238E27FC236}">
+                <a16:creationId xmlns:a16="http://schemas.microsoft.com/office/drawing/2014/main" id="{CAB2DBB3-4EEF-3DFF-199A-BA6AB3793D3C}"/>
+              </a:ext>
+            </a:extLst>
+          </p:cNvPr>
+          <p:cNvCxnSpPr/>
+          <p:nvPr/>
+        </p:nvCxnSpPr>
+        <p:spPr>
+          <a:xfrm>
+            <a:off x="609600" y="1447800"/>
+            <a:ext cx="11074400" cy="0"/>
+          </a:xfrm>
+          <a:prstGeom prst="line">
+            <a:avLst/>
+          </a:prstGeom>
+          <a:ln w="12700">
+            <a:solidFill>
+              <a:schemeClr val="tx1"/>
+            </a:solidFill>
+          </a:ln>
+        </p:spPr>
+        <p:style>
+          <a:lnRef idx="1">
+            <a:schemeClr val="accent1"/>
+          </a:lnRef>
+          <a:fillRef idx="0">
+            <a:schemeClr val="accent1"/>
+          </a:fillRef>
+          <a:effectRef idx="0">
+            <a:schemeClr val="accent1"/>
+          </a:effectRef>
+          <a:fontRef idx="minor">
+            <a:schemeClr val="tx1"/>
+          </a:fontRef>
+        </p:style>
+      </p:cxnSp>
+      <p:cxnSp>
+        <p:nvCxnSpPr>
+          <p:cNvPr id="14" name="Straight Connector 13">
+            <a:extLst>
+              <a:ext uri="{FF2B5EF4-FFF2-40B4-BE49-F238E27FC236}">
+                <a16:creationId xmlns:a16="http://schemas.microsoft.com/office/drawing/2014/main" id="{A1457289-6BB4-E107-2E46-8D2073E34153}"/>
+              </a:ext>
+            </a:extLst>
+          </p:cNvPr>
+          <p:cNvCxnSpPr/>
+          <p:nvPr/>
+        </p:nvCxnSpPr>
+        <p:spPr>
+          <a:xfrm>
+            <a:off x="609600" y="1447800"/>
+            <a:ext cx="11074400" cy="0"/>
+          </a:xfrm>
+          <a:prstGeom prst="line">
+            <a:avLst/>
+          </a:prstGeom>
+          <a:ln w="12700">
+            <a:solidFill>
+              <a:schemeClr val="tx1"/>
+            </a:solidFill>
+          </a:ln>
+        </p:spPr>
+        <p:style>
+          <a:lnRef idx="1">
+            <a:schemeClr val="accent1"/>
+          </a:lnRef>
+          <a:fillRef idx="0">
+            <a:schemeClr val="accent1"/>
+          </a:fillRef>
+          <a:effectRef idx="0">
+            <a:schemeClr val="accent1"/>
+          </a:effectRef>
+          <a:fontRef idx="minor">
+            <a:schemeClr val="tx1"/>
+          </a:fontRef>
+        </p:style>
+      </p:cxnSp>
+      <p:cxnSp>
+        <p:nvCxnSpPr>
+          <p:cNvPr id="15" name="Straight Connector 14">
+            <a:extLst>
+              <a:ext uri="{FF2B5EF4-FFF2-40B4-BE49-F238E27FC236}">
+                <a16:creationId xmlns:a16="http://schemas.microsoft.com/office/drawing/2014/main" id="{39DE626A-C732-60D0-0562-1226E2D9377D}"/>
+              </a:ext>
+            </a:extLst>
+          </p:cNvPr>
+          <p:cNvCxnSpPr/>
+          <p:nvPr userDrawn="1"/>
+        </p:nvCxnSpPr>
+        <p:spPr>
+          <a:xfrm>
+            <a:off x="609600" y="1447800"/>
+            <a:ext cx="11074400" cy="0"/>
+          </a:xfrm>
+          <a:prstGeom prst="line">
+            <a:avLst/>
+          </a:prstGeom>
+          <a:ln w="12700">
+            <a:solidFill>
+              <a:schemeClr val="tx1"/>
+            </a:solidFill>
+          </a:ln>
+        </p:spPr>
+        <p:style>
+          <a:lnRef idx="1">
+            <a:schemeClr val="accent1"/>
+          </a:lnRef>
+          <a:fillRef idx="0">
+            <a:schemeClr val="accent1"/>
+          </a:fillRef>
+          <a:effectRef idx="0">
+            <a:schemeClr val="accent1"/>
+          </a:effectRef>
+          <a:fontRef idx="minor">
+            <a:schemeClr val="tx1"/>
+          </a:fontRef>
+        </p:style>
+      </p:cxnSp>
     </p:spTree>
+    <p:extLst>
+      <p:ext uri="{BB962C8B-B14F-4D97-AF65-F5344CB8AC3E}">
+        <p14:creationId xmlns:p14="http://schemas.microsoft.com/office/powerpoint/2010/main" val="4037088903"/>
+      </p:ext>
+    </p:extLst>
   </p:cSld>
   <p:clrMapOvr>
     <a:masterClrMapping/>
@@ -3074,9 +4295,10 @@
           </a:lstStyle>
           <a:p>
             <a:r>
-              <a:rPr lang="en-US" dirty="0"/>
+              <a:rPr lang="en-GB"/>
               <a:t>Click to edit Master title style</a:t>
             </a:r>
+            <a:endParaRPr lang="en-US" dirty="0"/>
           </a:p>
         </p:txBody>
       </p:sp>
@@ -3098,7 +4320,7 @@
             <a:fld id="{1D8BD707-D9CF-40AE-B4C6-C98DA3205C09}" type="datetimeFigureOut">
               <a:rPr lang="en-US" smtClean="0"/>
               <a:pPr/>
-              <a:t>11/11/24</a:t>
+              <a:t>11/3/25</a:t>
             </a:fld>
             <a:endParaRPr lang="en-US"/>
           </a:p>
@@ -3151,7 +4373,7 @@
         <p:nvCxnSpPr>
           <p:cNvPr id="6" name="Straight Connector 5"/>
           <p:cNvCxnSpPr/>
-          <p:nvPr userDrawn="1"/>
+          <p:nvPr/>
         </p:nvCxnSpPr>
         <p:spPr>
           <a:xfrm>
@@ -3182,7 +4404,258 @@
           </a:fontRef>
         </p:style>
       </p:cxnSp>
+      <p:cxnSp>
+        <p:nvCxnSpPr>
+          <p:cNvPr id="7" name="Straight Connector 6">
+            <a:extLst>
+              <a:ext uri="{FF2B5EF4-FFF2-40B4-BE49-F238E27FC236}">
+                <a16:creationId xmlns:a16="http://schemas.microsoft.com/office/drawing/2014/main" id="{BDB4946F-2A50-46DF-D246-8E463A5B9E4E}"/>
+              </a:ext>
+            </a:extLst>
+          </p:cNvPr>
+          <p:cNvCxnSpPr/>
+          <p:nvPr/>
+        </p:nvCxnSpPr>
+        <p:spPr>
+          <a:xfrm>
+            <a:off x="609600" y="1447800"/>
+            <a:ext cx="11074400" cy="0"/>
+          </a:xfrm>
+          <a:prstGeom prst="line">
+            <a:avLst/>
+          </a:prstGeom>
+          <a:ln w="12700">
+            <a:solidFill>
+              <a:schemeClr val="tx1"/>
+            </a:solidFill>
+          </a:ln>
+        </p:spPr>
+        <p:style>
+          <a:lnRef idx="1">
+            <a:schemeClr val="accent1"/>
+          </a:lnRef>
+          <a:fillRef idx="0">
+            <a:schemeClr val="accent1"/>
+          </a:fillRef>
+          <a:effectRef idx="0">
+            <a:schemeClr val="accent1"/>
+          </a:effectRef>
+          <a:fontRef idx="minor">
+            <a:schemeClr val="tx1"/>
+          </a:fontRef>
+        </p:style>
+      </p:cxnSp>
+      <p:cxnSp>
+        <p:nvCxnSpPr>
+          <p:cNvPr id="8" name="Straight Connector 7">
+            <a:extLst>
+              <a:ext uri="{FF2B5EF4-FFF2-40B4-BE49-F238E27FC236}">
+                <a16:creationId xmlns:a16="http://schemas.microsoft.com/office/drawing/2014/main" id="{CCF61A43-37C0-D158-13BE-1753663F3BEC}"/>
+              </a:ext>
+            </a:extLst>
+          </p:cNvPr>
+          <p:cNvCxnSpPr/>
+          <p:nvPr/>
+        </p:nvCxnSpPr>
+        <p:spPr>
+          <a:xfrm>
+            <a:off x="609600" y="1447800"/>
+            <a:ext cx="11074400" cy="0"/>
+          </a:xfrm>
+          <a:prstGeom prst="line">
+            <a:avLst/>
+          </a:prstGeom>
+          <a:ln w="12700">
+            <a:solidFill>
+              <a:schemeClr val="tx1"/>
+            </a:solidFill>
+          </a:ln>
+        </p:spPr>
+        <p:style>
+          <a:lnRef idx="1">
+            <a:schemeClr val="accent1"/>
+          </a:lnRef>
+          <a:fillRef idx="0">
+            <a:schemeClr val="accent1"/>
+          </a:fillRef>
+          <a:effectRef idx="0">
+            <a:schemeClr val="accent1"/>
+          </a:effectRef>
+          <a:fontRef idx="minor">
+            <a:schemeClr val="tx1"/>
+          </a:fontRef>
+        </p:style>
+      </p:cxnSp>
+      <p:cxnSp>
+        <p:nvCxnSpPr>
+          <p:cNvPr id="9" name="Straight Connector 8">
+            <a:extLst>
+              <a:ext uri="{FF2B5EF4-FFF2-40B4-BE49-F238E27FC236}">
+                <a16:creationId xmlns:a16="http://schemas.microsoft.com/office/drawing/2014/main" id="{551A815F-BB18-F13C-32C4-8E79100BCF82}"/>
+              </a:ext>
+            </a:extLst>
+          </p:cNvPr>
+          <p:cNvCxnSpPr/>
+          <p:nvPr/>
+        </p:nvCxnSpPr>
+        <p:spPr>
+          <a:xfrm>
+            <a:off x="609600" y="1447800"/>
+            <a:ext cx="11074400" cy="0"/>
+          </a:xfrm>
+          <a:prstGeom prst="line">
+            <a:avLst/>
+          </a:prstGeom>
+          <a:ln w="12700">
+            <a:solidFill>
+              <a:schemeClr val="tx1"/>
+            </a:solidFill>
+          </a:ln>
+        </p:spPr>
+        <p:style>
+          <a:lnRef idx="1">
+            <a:schemeClr val="accent1"/>
+          </a:lnRef>
+          <a:fillRef idx="0">
+            <a:schemeClr val="accent1"/>
+          </a:fillRef>
+          <a:effectRef idx="0">
+            <a:schemeClr val="accent1"/>
+          </a:effectRef>
+          <a:fontRef idx="minor">
+            <a:schemeClr val="tx1"/>
+          </a:fontRef>
+        </p:style>
+      </p:cxnSp>
+      <p:cxnSp>
+        <p:nvCxnSpPr>
+          <p:cNvPr id="10" name="Straight Connector 9">
+            <a:extLst>
+              <a:ext uri="{FF2B5EF4-FFF2-40B4-BE49-F238E27FC236}">
+                <a16:creationId xmlns:a16="http://schemas.microsoft.com/office/drawing/2014/main" id="{1F0757EC-8007-C46D-7D50-F765C16D5B92}"/>
+              </a:ext>
+            </a:extLst>
+          </p:cNvPr>
+          <p:cNvCxnSpPr/>
+          <p:nvPr/>
+        </p:nvCxnSpPr>
+        <p:spPr>
+          <a:xfrm>
+            <a:off x="609600" y="1447800"/>
+            <a:ext cx="11074400" cy="0"/>
+          </a:xfrm>
+          <a:prstGeom prst="line">
+            <a:avLst/>
+          </a:prstGeom>
+          <a:ln w="12700">
+            <a:solidFill>
+              <a:schemeClr val="tx1"/>
+            </a:solidFill>
+          </a:ln>
+        </p:spPr>
+        <p:style>
+          <a:lnRef idx="1">
+            <a:schemeClr val="accent1"/>
+          </a:lnRef>
+          <a:fillRef idx="0">
+            <a:schemeClr val="accent1"/>
+          </a:fillRef>
+          <a:effectRef idx="0">
+            <a:schemeClr val="accent1"/>
+          </a:effectRef>
+          <a:fontRef idx="minor">
+            <a:schemeClr val="tx1"/>
+          </a:fontRef>
+        </p:style>
+      </p:cxnSp>
+      <p:cxnSp>
+        <p:nvCxnSpPr>
+          <p:cNvPr id="11" name="Straight Connector 10">
+            <a:extLst>
+              <a:ext uri="{FF2B5EF4-FFF2-40B4-BE49-F238E27FC236}">
+                <a16:creationId xmlns:a16="http://schemas.microsoft.com/office/drawing/2014/main" id="{BD082DFA-2D0D-E3FC-D879-A6D24EF7B7AE}"/>
+              </a:ext>
+            </a:extLst>
+          </p:cNvPr>
+          <p:cNvCxnSpPr/>
+          <p:nvPr/>
+        </p:nvCxnSpPr>
+        <p:spPr>
+          <a:xfrm>
+            <a:off x="609600" y="1447800"/>
+            <a:ext cx="11074400" cy="0"/>
+          </a:xfrm>
+          <a:prstGeom prst="line">
+            <a:avLst/>
+          </a:prstGeom>
+          <a:ln w="12700">
+            <a:solidFill>
+              <a:schemeClr val="tx1"/>
+            </a:solidFill>
+          </a:ln>
+        </p:spPr>
+        <p:style>
+          <a:lnRef idx="1">
+            <a:schemeClr val="accent1"/>
+          </a:lnRef>
+          <a:fillRef idx="0">
+            <a:schemeClr val="accent1"/>
+          </a:fillRef>
+          <a:effectRef idx="0">
+            <a:schemeClr val="accent1"/>
+          </a:effectRef>
+          <a:fontRef idx="minor">
+            <a:schemeClr val="tx1"/>
+          </a:fontRef>
+        </p:style>
+      </p:cxnSp>
+      <p:cxnSp>
+        <p:nvCxnSpPr>
+          <p:cNvPr id="12" name="Straight Connector 11">
+            <a:extLst>
+              <a:ext uri="{FF2B5EF4-FFF2-40B4-BE49-F238E27FC236}">
+                <a16:creationId xmlns:a16="http://schemas.microsoft.com/office/drawing/2014/main" id="{0F251A29-7993-54F5-5393-4446E4070D1E}"/>
+              </a:ext>
+            </a:extLst>
+          </p:cNvPr>
+          <p:cNvCxnSpPr/>
+          <p:nvPr userDrawn="1"/>
+        </p:nvCxnSpPr>
+        <p:spPr>
+          <a:xfrm>
+            <a:off x="609600" y="1447800"/>
+            <a:ext cx="11074400" cy="0"/>
+          </a:xfrm>
+          <a:prstGeom prst="line">
+            <a:avLst/>
+          </a:prstGeom>
+          <a:ln w="12700">
+            <a:solidFill>
+              <a:schemeClr val="tx1"/>
+            </a:solidFill>
+          </a:ln>
+        </p:spPr>
+        <p:style>
+          <a:lnRef idx="1">
+            <a:schemeClr val="accent1"/>
+          </a:lnRef>
+          <a:fillRef idx="0">
+            <a:schemeClr val="accent1"/>
+          </a:fillRef>
+          <a:effectRef idx="0">
+            <a:schemeClr val="accent1"/>
+          </a:effectRef>
+          <a:fontRef idx="minor">
+            <a:schemeClr val="tx1"/>
+          </a:fontRef>
+        </p:style>
+      </p:cxnSp>
     </p:spTree>
+    <p:extLst>
+      <p:ext uri="{BB962C8B-B14F-4D97-AF65-F5344CB8AC3E}">
+        <p14:creationId xmlns:p14="http://schemas.microsoft.com/office/powerpoint/2010/main" val="1368326571"/>
+      </p:ext>
+    </p:extLst>
   </p:cSld>
   <p:clrMapOvr>
     <a:masterClrMapping/>
@@ -3225,7 +4698,7 @@
             <a:fld id="{1D8BD707-D9CF-40AE-B4C6-C98DA3205C09}" type="datetimeFigureOut">
               <a:rPr lang="en-US" smtClean="0"/>
               <a:pPr/>
-              <a:t>11/11/24</a:t>
+              <a:t>11/3/25</a:t>
             </a:fld>
             <a:endParaRPr lang="en-US"/>
           </a:p>
@@ -3275,6 +4748,11 @@
         </p:txBody>
       </p:sp>
     </p:spTree>
+    <p:extLst>
+      <p:ext uri="{BB962C8B-B14F-4D97-AF65-F5344CB8AC3E}">
+        <p14:creationId xmlns:p14="http://schemas.microsoft.com/office/powerpoint/2010/main" val="158057112"/>
+      </p:ext>
+    </p:extLst>
   </p:cSld>
   <p:clrMapOvr>
     <a:masterClrMapping/>
@@ -3324,9 +4802,10 @@
           </a:lstStyle>
           <a:p>
             <a:r>
-              <a:rPr lang="en-US"/>
+              <a:rPr lang="en-GB"/>
               <a:t>Click to edit Master title style</a:t>
             </a:r>
+            <a:endParaRPr lang="en-US"/>
           </a:p>
         </p:txBody>
       </p:sp>
@@ -3380,37 +4859,38 @@
           <a:p>
             <a:pPr lvl="0"/>
             <a:r>
-              <a:rPr lang="en-US"/>
+              <a:rPr lang="en-GB"/>
               <a:t>Click to edit Master text styles</a:t>
             </a:r>
           </a:p>
           <a:p>
             <a:pPr lvl="1"/>
             <a:r>
-              <a:rPr lang="en-US"/>
+              <a:rPr lang="en-GB"/>
               <a:t>Second level</a:t>
             </a:r>
           </a:p>
           <a:p>
             <a:pPr lvl="2"/>
             <a:r>
-              <a:rPr lang="en-US"/>
+              <a:rPr lang="en-GB"/>
               <a:t>Third level</a:t>
             </a:r>
           </a:p>
           <a:p>
             <a:pPr lvl="3"/>
             <a:r>
-              <a:rPr lang="en-US"/>
+              <a:rPr lang="en-GB"/>
               <a:t>Fourth level</a:t>
             </a:r>
           </a:p>
           <a:p>
             <a:pPr lvl="4"/>
             <a:r>
-              <a:rPr lang="en-US"/>
+              <a:rPr lang="en-GB"/>
               <a:t>Fifth level</a:t>
             </a:r>
+            <a:endParaRPr lang="en-US"/>
           </a:p>
         </p:txBody>
       </p:sp>
@@ -3473,7 +4953,7 @@
           <a:p>
             <a:pPr lvl="0"/>
             <a:r>
-              <a:rPr lang="en-US"/>
+              <a:rPr lang="en-GB"/>
               <a:t>Click to edit Master text styles</a:t>
             </a:r>
           </a:p>
@@ -3497,7 +4977,7 @@
             <a:fld id="{1D8BD707-D9CF-40AE-B4C6-C98DA3205C09}" type="datetimeFigureOut">
               <a:rPr lang="en-US" smtClean="0"/>
               <a:pPr/>
-              <a:t>11/11/24</a:t>
+              <a:t>11/3/25</a:t>
             </a:fld>
             <a:endParaRPr lang="en-US"/>
           </a:p>
@@ -3547,6 +5027,11 @@
         </p:txBody>
       </p:sp>
     </p:spTree>
+    <p:extLst>
+      <p:ext uri="{BB962C8B-B14F-4D97-AF65-F5344CB8AC3E}">
+        <p14:creationId xmlns:p14="http://schemas.microsoft.com/office/powerpoint/2010/main" val="2400739347"/>
+      </p:ext>
+    </p:extLst>
   </p:cSld>
   <p:clrMapOvr>
     <a:masterClrMapping/>
@@ -3596,9 +5081,10 @@
           </a:lstStyle>
           <a:p>
             <a:r>
-              <a:rPr lang="en-US"/>
+              <a:rPr lang="en-GB"/>
               <a:t>Click to edit Master title style</a:t>
             </a:r>
+            <a:endParaRPr lang="en-US"/>
           </a:p>
         </p:txBody>
       </p:sp>
@@ -3659,6 +5145,10 @@
             </a:lvl9pPr>
           </a:lstStyle>
           <a:p>
+            <a:r>
+              <a:rPr lang="en-GB"/>
+              <a:t>Click icon to add picture</a:t>
+            </a:r>
             <a:endParaRPr lang="en-US"/>
           </a:p>
         </p:txBody>
@@ -3722,7 +5212,7 @@
           <a:p>
             <a:pPr lvl="0"/>
             <a:r>
-              <a:rPr lang="en-US"/>
+              <a:rPr lang="en-GB"/>
               <a:t>Click to edit Master text styles</a:t>
             </a:r>
           </a:p>
@@ -3746,7 +5236,7 @@
             <a:fld id="{1D8BD707-D9CF-40AE-B4C6-C98DA3205C09}" type="datetimeFigureOut">
               <a:rPr lang="en-US" smtClean="0"/>
               <a:pPr/>
-              <a:t>11/11/24</a:t>
+              <a:t>11/3/25</a:t>
             </a:fld>
             <a:endParaRPr lang="en-US"/>
           </a:p>
@@ -3796,6 +5286,11 @@
         </p:txBody>
       </p:sp>
     </p:spTree>
+    <p:extLst>
+      <p:ext uri="{BB962C8B-B14F-4D97-AF65-F5344CB8AC3E}">
+        <p14:creationId xmlns:p14="http://schemas.microsoft.com/office/powerpoint/2010/main" val="1631946650"/>
+      </p:ext>
+    </p:extLst>
   </p:cSld>
   <p:clrMapOvr>
     <a:masterClrMapping/>
@@ -3807,9 +5302,14 @@
 <p:sldMaster xmlns:a="http://schemas.openxmlformats.org/drawingml/2006/main" xmlns:r="http://schemas.openxmlformats.org/officeDocument/2006/relationships" xmlns:p="http://schemas.openxmlformats.org/presentationml/2006/main">
   <p:cSld>
     <p:bg>
-      <p:bgRef idx="1001">
-        <a:schemeClr val="bg1"/>
-      </p:bgRef>
+      <p:bgPr>
+        <a:solidFill>
+          <a:schemeClr val="bg1">
+            <a:lumMod val="85000"/>
+          </a:schemeClr>
+        </a:solidFill>
+        <a:effectLst/>
+      </p:bgPr>
     </p:bg>
     <p:spTree>
       <p:nvGrpSpPr>
@@ -3851,9 +5351,10 @@
           <a:lstStyle/>
           <a:p>
             <a:r>
-              <a:rPr lang="en-US"/>
+              <a:rPr lang="en-GB"/>
               <a:t>Click to edit Master title style</a:t>
             </a:r>
+            <a:endParaRPr lang="en-US"/>
           </a:p>
         </p:txBody>
       </p:sp>
@@ -3884,37 +5385,38 @@
           <a:p>
             <a:pPr lvl="0"/>
             <a:r>
-              <a:rPr lang="en-US"/>
+              <a:rPr lang="en-GB"/>
               <a:t>Click to edit Master text styles</a:t>
             </a:r>
           </a:p>
           <a:p>
             <a:pPr lvl="1"/>
             <a:r>
-              <a:rPr lang="en-US"/>
+              <a:rPr lang="en-GB"/>
               <a:t>Second level</a:t>
             </a:r>
           </a:p>
           <a:p>
             <a:pPr lvl="2"/>
             <a:r>
-              <a:rPr lang="en-US"/>
+              <a:rPr lang="en-GB"/>
               <a:t>Third level</a:t>
             </a:r>
           </a:p>
           <a:p>
             <a:pPr lvl="3"/>
             <a:r>
-              <a:rPr lang="en-US"/>
+              <a:rPr lang="en-GB"/>
               <a:t>Fourth level</a:t>
             </a:r>
           </a:p>
           <a:p>
             <a:pPr lvl="4"/>
             <a:r>
-              <a:rPr lang="en-US"/>
+              <a:rPr lang="en-GB"/>
               <a:t>Fifth level</a:t>
             </a:r>
+            <a:endParaRPr lang="en-US"/>
           </a:p>
         </p:txBody>
       </p:sp>
@@ -3954,7 +5456,7 @@
             <a:fld id="{1D8BD707-D9CF-40AE-B4C6-C98DA3205C09}" type="datetimeFigureOut">
               <a:rPr lang="en-US" smtClean="0"/>
               <a:pPr/>
-              <a:t>11/11/24</a:t>
+              <a:t>11/3/25</a:t>
             </a:fld>
             <a:endParaRPr lang="en-US"/>
           </a:p>
@@ -4040,20 +5542,28 @@
         </p:txBody>
       </p:sp>
     </p:spTree>
+    <p:extLst>
+      <p:ext uri="{BB962C8B-B14F-4D97-AF65-F5344CB8AC3E}">
+        <p14:creationId xmlns:p14="http://schemas.microsoft.com/office/powerpoint/2010/main" val="2326180092"/>
+      </p:ext>
+    </p:extLst>
   </p:cSld>
   <p:clrMap bg1="lt1" tx1="dk1" bg2="lt2" tx2="dk2" accent1="accent1" accent2="accent2" accent3="accent3" accent4="accent4" accent5="accent5" accent6="accent6" hlink="hlink" folHlink="folHlink"/>
   <p:sldLayoutIdLst>
-    <p:sldLayoutId id="2147483649" r:id="rId1"/>
-    <p:sldLayoutId id="2147483650" r:id="rId2"/>
-    <p:sldLayoutId id="2147483651" r:id="rId3"/>
-    <p:sldLayoutId id="2147483652" r:id="rId4"/>
-    <p:sldLayoutId id="2147483653" r:id="rId5"/>
-    <p:sldLayoutId id="2147483654" r:id="rId6"/>
-    <p:sldLayoutId id="2147483655" r:id="rId7"/>
-    <p:sldLayoutId id="2147483656" r:id="rId8"/>
-    <p:sldLayoutId id="2147483657" r:id="rId9"/>
-    <p:sldLayoutId id="2147483658" r:id="rId10"/>
-    <p:sldLayoutId id="2147483659" r:id="rId11"/>
+    <p:sldLayoutId id="2147483661" r:id="rId1"/>
+    <p:sldLayoutId id="2147483662" r:id="rId2"/>
+    <p:sldLayoutId id="2147483663" r:id="rId3"/>
+    <p:sldLayoutId id="2147483664" r:id="rId4"/>
+    <p:sldLayoutId id="2147483665" r:id="rId5"/>
+    <p:sldLayoutId id="2147483666" r:id="rId6"/>
+    <p:sldLayoutId id="2147483667" r:id="rId7"/>
+    <p:sldLayoutId id="2147483668" r:id="rId8"/>
+    <p:sldLayoutId id="2147483669" r:id="rId9"/>
+    <p:sldLayoutId id="2147483670" r:id="rId10"/>
+    <p:sldLayoutId id="2147483671" r:id="rId11"/>
+    <p:sldLayoutId id="2147483672" r:id="rId12"/>
+    <p:sldLayoutId id="2147483673" r:id="rId13"/>
+    <p:sldLayoutId id="2147483674" r:id="rId14"/>
   </p:sldLayoutIdLst>
   <p:txStyles>
     <p:titleStyle>
@@ -4537,12 +6047,121 @@
           </a:p>
         </p:txBody>
       </p:sp>
+      <p:sp>
+        <p:nvSpPr>
+          <p:cNvPr id="7" name="TextBox 6">
+            <a:extLst>
+              <a:ext uri="{FF2B5EF4-FFF2-40B4-BE49-F238E27FC236}">
+                <a16:creationId xmlns:a16="http://schemas.microsoft.com/office/drawing/2014/main" id="{C95853B1-E5DC-3BE1-C428-88FD7658E381}"/>
+              </a:ext>
+            </a:extLst>
+          </p:cNvPr>
+          <p:cNvSpPr txBox="1"/>
+          <p:nvPr/>
+        </p:nvSpPr>
+        <p:spPr>
+          <a:xfrm>
+            <a:off x="3505200" y="3743235"/>
+            <a:ext cx="5562600" cy="1200329"/>
+          </a:xfrm>
+          <a:prstGeom prst="rect">
+            <a:avLst/>
+          </a:prstGeom>
+          <a:noFill/>
+        </p:spPr>
+        <p:txBody>
+          <a:bodyPr wrap="square" rtlCol="0">
+            <a:spAutoFit/>
+          </a:bodyPr>
+          <a:lstStyle/>
+          <a:p>
+            <a:r>
+              <a:rPr lang="en-IE" sz="2400" dirty="0">
+                <a:solidFill>
+                  <a:schemeClr val="tx1">
+                    <a:lumMod val="75000"/>
+                    <a:lumOff val="25000"/>
+                  </a:schemeClr>
+                </a:solidFill>
+              </a:rPr>
+              <a:t>Dr. </a:t>
+            </a:r>
+            <a:r>
+              <a:rPr lang="en-IE" sz="2400" dirty="0" err="1">
+                <a:solidFill>
+                  <a:schemeClr val="tx1">
+                    <a:lumMod val="75000"/>
+                    <a:lumOff val="25000"/>
+                  </a:schemeClr>
+                </a:solidFill>
+              </a:rPr>
+              <a:t>Siobhán</a:t>
+            </a:r>
+            <a:r>
+              <a:rPr lang="en-IE" sz="2400" dirty="0">
+                <a:solidFill>
+                  <a:schemeClr val="tx1">
+                    <a:lumMod val="75000"/>
+                    <a:lumOff val="25000"/>
+                  </a:schemeClr>
+                </a:solidFill>
+              </a:rPr>
+              <a:t> </a:t>
+            </a:r>
+            <a:r>
+              <a:rPr lang="en-IE" sz="2400" dirty="0" err="1">
+                <a:solidFill>
+                  <a:schemeClr val="tx1">
+                    <a:lumMod val="75000"/>
+                    <a:lumOff val="25000"/>
+                  </a:schemeClr>
+                </a:solidFill>
+              </a:rPr>
+              <a:t>Drohan,</a:t>
+            </a:r>
+            <a:endParaRPr lang="en-IE" sz="2400" dirty="0">
+              <a:solidFill>
+                <a:schemeClr val="tx1">
+                  <a:lumMod val="75000"/>
+                  <a:lumOff val="25000"/>
+                </a:schemeClr>
+              </a:solidFill>
+            </a:endParaRPr>
+          </a:p>
+          <a:p>
+            <a:r>
+              <a:rPr lang="en-IE" sz="2400" dirty="0">
+                <a:solidFill>
+                  <a:schemeClr val="tx1">
+                    <a:lumMod val="75000"/>
+                    <a:lumOff val="25000"/>
+                  </a:schemeClr>
+                </a:solidFill>
+              </a:rPr>
+              <a:t>Ms. Mairead Meagher,</a:t>
+            </a:r>
+          </a:p>
+          <a:p>
+            <a:r>
+              <a:rPr lang="en-IE" sz="2400" dirty="0">
+                <a:solidFill>
+                  <a:schemeClr val="tx1">
+                    <a:lumMod val="75000"/>
+                    <a:lumOff val="25000"/>
+                  </a:schemeClr>
+                </a:solidFill>
+              </a:rPr>
+              <a:t>Ms. Siobhán Roche.</a:t>
+            </a:r>
+          </a:p>
+        </p:txBody>
+      </p:sp>
       <p:pic>
         <p:nvPicPr>
-          <p:cNvPr id="5" name="Picture 4" descr="Text&#10;&#10;Description automatically generated">
+          <p:cNvPr id="8" name="Picture 7">
             <a:extLst>
               <a:ext uri="{FF2B5EF4-FFF2-40B4-BE49-F238E27FC236}">
-                <a16:creationId xmlns:a16="http://schemas.microsoft.com/office/drawing/2014/main" id="{A1D28EE7-B2EB-8E50-50D0-7AA41ECE5EE3}"/>
+                <a16:creationId xmlns:a16="http://schemas.microsoft.com/office/drawing/2014/main" id="{1647E3AD-2570-D159-F739-FC6AF9C16ED3}"/>
               </a:ext>
             </a:extLst>
           </p:cNvPr>
@@ -4565,123 +6184,14 @@
         </p:blipFill>
         <p:spPr>
           <a:xfrm>
-            <a:off x="651641" y="5501441"/>
-            <a:ext cx="2286000" cy="1281546"/>
+            <a:off x="838200" y="5768129"/>
+            <a:ext cx="1905954" cy="1068489"/>
           </a:xfrm>
           <a:prstGeom prst="rect">
             <a:avLst/>
           </a:prstGeom>
         </p:spPr>
       </p:pic>
-      <p:sp>
-        <p:nvSpPr>
-          <p:cNvPr id="7" name="TextBox 6">
-            <a:extLst>
-              <a:ext uri="{FF2B5EF4-FFF2-40B4-BE49-F238E27FC236}">
-                <a16:creationId xmlns:a16="http://schemas.microsoft.com/office/drawing/2014/main" id="{C95853B1-E5DC-3BE1-C428-88FD7658E381}"/>
-              </a:ext>
-            </a:extLst>
-          </p:cNvPr>
-          <p:cNvSpPr txBox="1"/>
-          <p:nvPr/>
-        </p:nvSpPr>
-        <p:spPr>
-          <a:xfrm>
-            <a:off x="3505200" y="3743235"/>
-            <a:ext cx="5562600" cy="1200329"/>
-          </a:xfrm>
-          <a:prstGeom prst="rect">
-            <a:avLst/>
-          </a:prstGeom>
-          <a:noFill/>
-        </p:spPr>
-        <p:txBody>
-          <a:bodyPr wrap="square" rtlCol="0">
-            <a:spAutoFit/>
-          </a:bodyPr>
-          <a:lstStyle/>
-          <a:p>
-            <a:r>
-              <a:rPr lang="en-IE" sz="2400" dirty="0">
-                <a:solidFill>
-                  <a:schemeClr val="tx1">
-                    <a:lumMod val="75000"/>
-                    <a:lumOff val="25000"/>
-                  </a:schemeClr>
-                </a:solidFill>
-              </a:rPr>
-              <a:t>Dr. </a:t>
-            </a:r>
-            <a:r>
-              <a:rPr lang="en-IE" sz="2400" dirty="0" err="1">
-                <a:solidFill>
-                  <a:schemeClr val="tx1">
-                    <a:lumMod val="75000"/>
-                    <a:lumOff val="25000"/>
-                  </a:schemeClr>
-                </a:solidFill>
-              </a:rPr>
-              <a:t>Siobhán</a:t>
-            </a:r>
-            <a:r>
-              <a:rPr lang="en-IE" sz="2400" dirty="0">
-                <a:solidFill>
-                  <a:schemeClr val="tx1">
-                    <a:lumMod val="75000"/>
-                    <a:lumOff val="25000"/>
-                  </a:schemeClr>
-                </a:solidFill>
-              </a:rPr>
-              <a:t> </a:t>
-            </a:r>
-            <a:r>
-              <a:rPr lang="en-IE" sz="2400" dirty="0" err="1">
-                <a:solidFill>
-                  <a:schemeClr val="tx1">
-                    <a:lumMod val="75000"/>
-                    <a:lumOff val="25000"/>
-                  </a:schemeClr>
-                </a:solidFill>
-              </a:rPr>
-              <a:t>Drohan,</a:t>
-            </a:r>
-            <a:endParaRPr lang="en-IE" sz="2400" dirty="0">
-              <a:solidFill>
-                <a:schemeClr val="tx1">
-                  <a:lumMod val="75000"/>
-                  <a:lumOff val="25000"/>
-                </a:schemeClr>
-              </a:solidFill>
-            </a:endParaRPr>
-          </a:p>
-          <a:p>
-            <a:r>
-              <a:rPr lang="en-IE" sz="2400" dirty="0">
-                <a:solidFill>
-                  <a:schemeClr val="tx1">
-                    <a:lumMod val="75000"/>
-                    <a:lumOff val="25000"/>
-                  </a:schemeClr>
-                </a:solidFill>
-              </a:rPr>
-              <a:t>Ms. Mairead Meagher,</a:t>
-            </a:r>
-          </a:p>
-          <a:p>
-            <a:r>
-              <a:rPr lang="en-IE" sz="2400" dirty="0">
-                <a:solidFill>
-                  <a:schemeClr val="tx1">
-                    <a:lumMod val="75000"/>
-                    <a:lumOff val="25000"/>
-                  </a:schemeClr>
-                </a:solidFill>
-              </a:rPr>
-              <a:t>Ms. Siobhán Roche.</a:t>
-            </a:r>
-          </a:p>
-        </p:txBody>
-      </p:sp>
     </p:spTree>
     <p:extLst>
       <p:ext uri="{BB962C8B-B14F-4D97-AF65-F5344CB8AC3E}">
@@ -14134,144 +15644,6 @@
           </a:p>
         </p:txBody>
       </p:sp>
-      <p:sp>
-        <p:nvSpPr>
-          <p:cNvPr id="10" name="Freeform: Shape 9">
-            <a:extLst>
-              <a:ext uri="{FF2B5EF4-FFF2-40B4-BE49-F238E27FC236}">
-                <a16:creationId xmlns:a16="http://schemas.microsoft.com/office/drawing/2014/main" id="{E49CC64F-7275-4E33-961B-0C5CDC439875}"/>
-              </a:ext>
-              <a:ext uri="{C183D7F6-B498-43B3-948B-1728B52AA6E4}">
-                <adec:decorative xmlns:adec="http://schemas.microsoft.com/office/drawing/2017/decorative" val="1"/>
-              </a:ext>
-            </a:extLst>
-          </p:cNvPr>
-          <p:cNvSpPr>
-            <a:spLocks noGrp="1" noRot="1" noChangeAspect="1" noMove="1" noResize="1" noEditPoints="1" noAdjustHandles="1" noChangeArrowheads="1" noChangeShapeType="1" noTextEdit="1"/>
-          </p:cNvSpPr>
-          <p:nvPr>
-            <p:extLst>
-              <p:ext uri="{386F3935-93C4-4BCD-93E2-E3B085C9AB24}">
-                <p16:designElem xmlns:p16="http://schemas.microsoft.com/office/powerpoint/2015/main" val="1"/>
-              </p:ext>
-            </p:extLst>
-          </p:nvPr>
-        </p:nvSpPr>
-        <p:spPr>
-          <a:xfrm flipH="1" flipV="1">
-            <a:off x="1" y="0"/>
-            <a:ext cx="7188051" cy="6858000"/>
-          </a:xfrm>
-          <a:custGeom>
-            <a:avLst/>
-            <a:gdLst>
-              <a:gd name="connsiteX0" fmla="*/ 7188051 w 7188051"/>
-              <a:gd name="connsiteY0" fmla="*/ 6858000 h 6858000"/>
-              <a:gd name="connsiteX1" fmla="*/ 108694 w 7188051"/>
-              <a:gd name="connsiteY1" fmla="*/ 6858000 h 6858000"/>
-              <a:gd name="connsiteX2" fmla="*/ 79127 w 7188051"/>
-              <a:gd name="connsiteY2" fmla="*/ 6681235 h 6858000"/>
-              <a:gd name="connsiteX3" fmla="*/ 0 w 7188051"/>
-              <a:gd name="connsiteY3" fmla="*/ 5565888 h 6858000"/>
-              <a:gd name="connsiteX4" fmla="*/ 2190696 w 7188051"/>
-              <a:gd name="connsiteY4" fmla="*/ 145339 h 6858000"/>
-              <a:gd name="connsiteX5" fmla="*/ 2339431 w 7188051"/>
-              <a:gd name="connsiteY5" fmla="*/ 0 h 6858000"/>
-              <a:gd name="connsiteX6" fmla="*/ 7188051 w 7188051"/>
-              <a:gd name="connsiteY6" fmla="*/ 0 h 6858000"/>
-            </a:gdLst>
-            <a:ahLst/>
-            <a:cxnLst>
-              <a:cxn ang="0">
-                <a:pos x="connsiteX0" y="connsiteY0"/>
-              </a:cxn>
-              <a:cxn ang="0">
-                <a:pos x="connsiteX1" y="connsiteY1"/>
-              </a:cxn>
-              <a:cxn ang="0">
-                <a:pos x="connsiteX2" y="connsiteY2"/>
-              </a:cxn>
-              <a:cxn ang="0">
-                <a:pos x="connsiteX3" y="connsiteY3"/>
-              </a:cxn>
-              <a:cxn ang="0">
-                <a:pos x="connsiteX4" y="connsiteY4"/>
-              </a:cxn>
-              <a:cxn ang="0">
-                <a:pos x="connsiteX5" y="connsiteY5"/>
-              </a:cxn>
-              <a:cxn ang="0">
-                <a:pos x="connsiteX6" y="connsiteY6"/>
-              </a:cxn>
-            </a:cxnLst>
-            <a:rect l="l" t="t" r="r" b="b"/>
-            <a:pathLst>
-              <a:path w="7188051" h="6858000">
-                <a:moveTo>
-                  <a:pt x="7188051" y="6858000"/>
-                </a:moveTo>
-                <a:lnTo>
-                  <a:pt x="108694" y="6858000"/>
-                </a:lnTo>
-                <a:lnTo>
-                  <a:pt x="79127" y="6681235"/>
-                </a:lnTo>
-                <a:cubicBezTo>
-                  <a:pt x="26981" y="6316967"/>
-                  <a:pt x="0" y="5944579"/>
-                  <a:pt x="0" y="5565888"/>
-                </a:cubicBezTo>
-                <a:cubicBezTo>
-                  <a:pt x="0" y="3459953"/>
-                  <a:pt x="834428" y="1548908"/>
-                  <a:pt x="2190696" y="145339"/>
-                </a:cubicBezTo>
-                <a:lnTo>
-                  <a:pt x="2339431" y="0"/>
-                </a:lnTo>
-                <a:lnTo>
-                  <a:pt x="7188051" y="0"/>
-                </a:lnTo>
-                <a:close/>
-              </a:path>
-            </a:pathLst>
-          </a:custGeom>
-          <a:solidFill>
-            <a:schemeClr val="tx1">
-              <a:alpha val="80000"/>
-            </a:schemeClr>
-          </a:solidFill>
-          <a:ln>
-            <a:noFill/>
-          </a:ln>
-        </p:spPr>
-        <p:style>
-          <a:lnRef idx="2">
-            <a:schemeClr val="accent1">
-              <a:shade val="50000"/>
-            </a:schemeClr>
-          </a:lnRef>
-          <a:fillRef idx="1">
-            <a:schemeClr val="accent1"/>
-          </a:fillRef>
-          <a:effectRef idx="0">
-            <a:schemeClr val="accent1"/>
-          </a:effectRef>
-          <a:fontRef idx="minor">
-            <a:schemeClr val="lt1"/>
-          </a:fontRef>
-        </p:style>
-        <p:txBody>
-          <a:bodyPr wrap="square" rtlCol="0" anchor="ctr">
-            <a:noAutofit/>
-          </a:bodyPr>
-          <a:lstStyle/>
-          <a:p>
-            <a:pPr algn="ctr"/>
-            <a:endParaRPr lang="en-US"/>
-          </a:p>
-        </p:txBody>
-      </p:sp>
       <p:pic>
         <p:nvPicPr>
           <p:cNvPr id="3" name="Picture 2" descr="Icon&#10;&#10;Description automatically generated">
@@ -14403,348 +15775,6 @@
           </a:p>
         </p:txBody>
       </p:sp>
-      <p:sp>
-        <p:nvSpPr>
-          <p:cNvPr id="3" name="Rectangle 2">
-            <a:extLst>
-              <a:ext uri="{FF2B5EF4-FFF2-40B4-BE49-F238E27FC236}">
-                <a16:creationId xmlns:a16="http://schemas.microsoft.com/office/drawing/2014/main" id="{7C419A6C-9B5A-424C-99BA-93AEEC632613}"/>
-              </a:ext>
-            </a:extLst>
-          </p:cNvPr>
-          <p:cNvSpPr/>
-          <p:nvPr/>
-        </p:nvSpPr>
-        <p:spPr>
-          <a:xfrm>
-            <a:off x="7156938" y="335498"/>
-            <a:ext cx="4419600" cy="6247864"/>
-          </a:xfrm>
-          <a:prstGeom prst="rect">
-            <a:avLst/>
-          </a:prstGeom>
-        </p:spPr>
-        <p:style>
-          <a:lnRef idx="2">
-            <a:schemeClr val="accent1"/>
-          </a:lnRef>
-          <a:fillRef idx="1">
-            <a:schemeClr val="lt1"/>
-          </a:fillRef>
-          <a:effectRef idx="0">
-            <a:schemeClr val="accent1"/>
-          </a:effectRef>
-          <a:fontRef idx="minor">
-            <a:schemeClr val="dk1"/>
-          </a:fontRef>
-        </p:style>
-        <p:txBody>
-          <a:bodyPr wrap="square">
-            <a:spAutoFit/>
-          </a:bodyPr>
-          <a:lstStyle/>
-          <a:p>
-            <a:r>
-              <a:rPr lang="en-IE" sz="2000" b="1" dirty="0">
-                <a:solidFill>
-                  <a:srgbClr val="000080"/>
-                </a:solidFill>
-              </a:rPr>
-              <a:t>public </a:t>
-            </a:r>
-            <a:r>
-              <a:rPr lang="en-IE" sz="2000" dirty="0"/>
-              <a:t>String </a:t>
-            </a:r>
-            <a:r>
-              <a:rPr lang="en-IE" sz="2000" dirty="0" err="1"/>
-              <a:t>getName</a:t>
-            </a:r>
-            <a:r>
-              <a:rPr lang="en-IE" sz="2000" dirty="0"/>
-              <a:t>() {</a:t>
-            </a:r>
-            <a:br>
-              <a:rPr lang="en-IE" sz="2000" dirty="0"/>
-            </a:br>
-            <a:r>
-              <a:rPr lang="en-IE" sz="2000" dirty="0"/>
-              <a:t>    </a:t>
-            </a:r>
-            <a:r>
-              <a:rPr lang="en-IE" sz="2000" b="1" dirty="0">
-                <a:solidFill>
-                  <a:srgbClr val="000080"/>
-                </a:solidFill>
-              </a:rPr>
-              <a:t>return </a:t>
-            </a:r>
-            <a:r>
-              <a:rPr lang="en-IE" sz="2000" b="1" dirty="0">
-                <a:solidFill>
-                  <a:srgbClr val="660E7A"/>
-                </a:solidFill>
-              </a:rPr>
-              <a:t>name</a:t>
-            </a:r>
-            <a:r>
-              <a:rPr lang="en-IE" sz="2000" dirty="0"/>
-              <a:t>;</a:t>
-            </a:r>
-            <a:br>
-              <a:rPr lang="en-IE" sz="2000" dirty="0"/>
-            </a:br>
-            <a:r>
-              <a:rPr lang="en-IE" sz="2000" dirty="0"/>
-              <a:t>}</a:t>
-            </a:r>
-            <a:br>
-              <a:rPr lang="en-IE" sz="2000" dirty="0"/>
-            </a:br>
-            <a:br>
-              <a:rPr lang="en-IE" sz="2000" dirty="0"/>
-            </a:br>
-            <a:r>
-              <a:rPr lang="en-IE" sz="2000" b="1" dirty="0">
-                <a:solidFill>
-                  <a:srgbClr val="000080"/>
-                </a:solidFill>
-              </a:rPr>
-              <a:t>public double </a:t>
-            </a:r>
-            <a:r>
-              <a:rPr lang="en-IE" sz="2000" dirty="0" err="1"/>
-              <a:t>getHeight</a:t>
-            </a:r>
-            <a:r>
-              <a:rPr lang="en-IE" sz="2000" dirty="0"/>
-              <a:t>() {</a:t>
-            </a:r>
-            <a:br>
-              <a:rPr lang="en-IE" sz="2000" dirty="0"/>
-            </a:br>
-            <a:r>
-              <a:rPr lang="en-IE" sz="2000" dirty="0"/>
-              <a:t>    </a:t>
-            </a:r>
-            <a:r>
-              <a:rPr lang="en-IE" sz="2000" b="1" dirty="0">
-                <a:solidFill>
-                  <a:srgbClr val="000080"/>
-                </a:solidFill>
-              </a:rPr>
-              <a:t>return </a:t>
-            </a:r>
-            <a:r>
-              <a:rPr lang="en-IE" sz="2000" b="1" dirty="0">
-                <a:solidFill>
-                  <a:srgbClr val="660E7A"/>
-                </a:solidFill>
-              </a:rPr>
-              <a:t>height</a:t>
-            </a:r>
-            <a:r>
-              <a:rPr lang="en-IE" sz="2000" dirty="0"/>
-              <a:t>;</a:t>
-            </a:r>
-            <a:br>
-              <a:rPr lang="en-IE" sz="2000" dirty="0"/>
-            </a:br>
-            <a:r>
-              <a:rPr lang="en-IE" sz="2000" dirty="0"/>
-              <a:t>}</a:t>
-            </a:r>
-            <a:br>
-              <a:rPr lang="en-IE" sz="2000" dirty="0"/>
-            </a:br>
-            <a:br>
-              <a:rPr lang="en-IE" sz="2000" dirty="0"/>
-            </a:br>
-            <a:r>
-              <a:rPr lang="en-IE" sz="2000" b="1" dirty="0">
-                <a:solidFill>
-                  <a:srgbClr val="000080"/>
-                </a:solidFill>
-              </a:rPr>
-              <a:t>public double </a:t>
-            </a:r>
-            <a:r>
-              <a:rPr lang="en-IE" sz="2000" dirty="0" err="1"/>
-              <a:t>getWeight</a:t>
-            </a:r>
-            <a:r>
-              <a:rPr lang="en-IE" sz="2000" dirty="0"/>
-              <a:t>() {</a:t>
-            </a:r>
-            <a:br>
-              <a:rPr lang="en-IE" sz="2000" dirty="0"/>
-            </a:br>
-            <a:r>
-              <a:rPr lang="en-IE" sz="2000" dirty="0"/>
-              <a:t>    </a:t>
-            </a:r>
-            <a:r>
-              <a:rPr lang="en-IE" sz="2000" b="1" dirty="0">
-                <a:solidFill>
-                  <a:srgbClr val="000080"/>
-                </a:solidFill>
-              </a:rPr>
-              <a:t>return </a:t>
-            </a:r>
-            <a:r>
-              <a:rPr lang="en-IE" sz="2000" b="1" dirty="0">
-                <a:solidFill>
-                  <a:srgbClr val="660E7A"/>
-                </a:solidFill>
-              </a:rPr>
-              <a:t>weight</a:t>
-            </a:r>
-            <a:r>
-              <a:rPr lang="en-IE" sz="2000" dirty="0"/>
-              <a:t>;</a:t>
-            </a:r>
-            <a:br>
-              <a:rPr lang="en-IE" sz="2000" dirty="0"/>
-            </a:br>
-            <a:r>
-              <a:rPr lang="en-IE" sz="2000" dirty="0"/>
-              <a:t>}</a:t>
-            </a:r>
-            <a:br>
-              <a:rPr lang="en-IE" sz="2000" dirty="0"/>
-            </a:br>
-            <a:br>
-              <a:rPr lang="en-IE" sz="2000" dirty="0"/>
-            </a:br>
-            <a:br>
-              <a:rPr lang="en-IE" sz="2000" dirty="0"/>
-            </a:br>
-            <a:r>
-              <a:rPr lang="en-IE" sz="2000" b="1" dirty="0">
-                <a:solidFill>
-                  <a:srgbClr val="000080"/>
-                </a:solidFill>
-              </a:rPr>
-              <a:t>public int </a:t>
-            </a:r>
-            <a:r>
-              <a:rPr lang="en-IE" sz="2000" dirty="0" err="1"/>
-              <a:t>getMembershipNumber</a:t>
-            </a:r>
-            <a:r>
-              <a:rPr lang="en-IE" sz="2000" dirty="0"/>
-              <a:t>() {</a:t>
-            </a:r>
-            <a:br>
-              <a:rPr lang="en-IE" sz="2000" dirty="0"/>
-            </a:br>
-            <a:r>
-              <a:rPr lang="en-IE" sz="2000" dirty="0"/>
-              <a:t>    </a:t>
-            </a:r>
-            <a:r>
-              <a:rPr lang="en-IE" sz="2000" b="1" dirty="0">
-                <a:solidFill>
-                  <a:srgbClr val="000080"/>
-                </a:solidFill>
-              </a:rPr>
-              <a:t>return </a:t>
-            </a:r>
-            <a:r>
-              <a:rPr lang="en-IE" sz="2000" b="1" dirty="0" err="1">
-                <a:solidFill>
-                  <a:srgbClr val="660E7A"/>
-                </a:solidFill>
-              </a:rPr>
-              <a:t>membershipNumber</a:t>
-            </a:r>
-            <a:r>
-              <a:rPr lang="en-IE" sz="2000" dirty="0"/>
-              <a:t>;</a:t>
-            </a:r>
-            <a:br>
-              <a:rPr lang="en-IE" sz="2000" dirty="0"/>
-            </a:br>
-            <a:r>
-              <a:rPr lang="en-IE" sz="2000" dirty="0"/>
-              <a:t>}</a:t>
-            </a:r>
-            <a:br>
-              <a:rPr lang="en-IE" sz="2000" dirty="0"/>
-            </a:br>
-            <a:br>
-              <a:rPr lang="en-IE" sz="2000" dirty="0"/>
-            </a:br>
-            <a:r>
-              <a:rPr lang="en-IE" sz="2000" b="1" dirty="0">
-                <a:solidFill>
-                  <a:srgbClr val="000080"/>
-                </a:solidFill>
-              </a:rPr>
-              <a:t>public </a:t>
-            </a:r>
-            <a:r>
-              <a:rPr lang="en-IE" sz="2000" b="1" dirty="0" err="1">
-                <a:solidFill>
-                  <a:srgbClr val="000080"/>
-                </a:solidFill>
-              </a:rPr>
-              <a:t>boolean</a:t>
-            </a:r>
-            <a:r>
-              <a:rPr lang="en-IE" sz="2000" b="1" dirty="0">
-                <a:solidFill>
-                  <a:srgbClr val="000080"/>
-                </a:solidFill>
-              </a:rPr>
-              <a:t> </a:t>
-            </a:r>
-            <a:r>
-              <a:rPr lang="en-IE" sz="2000" dirty="0" err="1"/>
-              <a:t>isCurrentGymMember</a:t>
-            </a:r>
-            <a:r>
-              <a:rPr lang="en-IE" sz="2000" dirty="0"/>
-              <a:t>() {</a:t>
-            </a:r>
-            <a:br>
-              <a:rPr lang="en-IE" sz="2000" dirty="0"/>
-            </a:br>
-            <a:r>
-              <a:rPr lang="en-IE" sz="2000" dirty="0"/>
-              <a:t>    </a:t>
-            </a:r>
-            <a:r>
-              <a:rPr lang="en-IE" sz="2000" b="1" dirty="0">
-                <a:solidFill>
-                  <a:srgbClr val="000080"/>
-                </a:solidFill>
-              </a:rPr>
-              <a:t>return </a:t>
-            </a:r>
-            <a:r>
-              <a:rPr lang="en-IE" sz="2000" b="1" dirty="0" err="1">
-                <a:solidFill>
-                  <a:srgbClr val="660E7A"/>
-                </a:solidFill>
-              </a:rPr>
-              <a:t>isCurrentGymMember</a:t>
-            </a:r>
-            <a:r>
-              <a:rPr lang="en-IE" sz="2000" dirty="0"/>
-              <a:t>;</a:t>
-            </a:r>
-            <a:br>
-              <a:rPr lang="en-IE" sz="2000" dirty="0"/>
-            </a:br>
-            <a:r>
-              <a:rPr lang="en-IE" sz="2000" dirty="0"/>
-              <a:t>}</a:t>
-            </a:r>
-            <a:endParaRPr lang="en-US" sz="2000" dirty="0"/>
-          </a:p>
-        </p:txBody>
-      </p:sp>
       <p:pic>
         <p:nvPicPr>
           <p:cNvPr id="16" name="Content Placeholder 10" descr="Icon&#10;&#10;Description automatically generated">
@@ -14780,6 +15810,348 @@
           </a:xfrm>
         </p:spPr>
       </p:pic>
+      <p:sp>
+        <p:nvSpPr>
+          <p:cNvPr id="3" name="Rectangle 2">
+            <a:extLst>
+              <a:ext uri="{FF2B5EF4-FFF2-40B4-BE49-F238E27FC236}">
+                <a16:creationId xmlns:a16="http://schemas.microsoft.com/office/drawing/2014/main" id="{7C419A6C-9B5A-424C-99BA-93AEEC632613}"/>
+              </a:ext>
+            </a:extLst>
+          </p:cNvPr>
+          <p:cNvSpPr/>
+          <p:nvPr/>
+        </p:nvSpPr>
+        <p:spPr>
+          <a:xfrm>
+            <a:off x="7156938" y="335498"/>
+            <a:ext cx="4419600" cy="6247864"/>
+          </a:xfrm>
+          <a:prstGeom prst="rect">
+            <a:avLst/>
+          </a:prstGeom>
+        </p:spPr>
+        <p:style>
+          <a:lnRef idx="2">
+            <a:schemeClr val="accent1"/>
+          </a:lnRef>
+          <a:fillRef idx="1">
+            <a:schemeClr val="lt1"/>
+          </a:fillRef>
+          <a:effectRef idx="0">
+            <a:schemeClr val="accent1"/>
+          </a:effectRef>
+          <a:fontRef idx="minor">
+            <a:schemeClr val="dk1"/>
+          </a:fontRef>
+        </p:style>
+        <p:txBody>
+          <a:bodyPr wrap="square">
+            <a:spAutoFit/>
+          </a:bodyPr>
+          <a:lstStyle/>
+          <a:p>
+            <a:r>
+              <a:rPr lang="en-IE" sz="2000" b="1" dirty="0">
+                <a:solidFill>
+                  <a:srgbClr val="000080"/>
+                </a:solidFill>
+              </a:rPr>
+              <a:t>public </a:t>
+            </a:r>
+            <a:r>
+              <a:rPr lang="en-IE" sz="2000" dirty="0"/>
+              <a:t>String </a:t>
+            </a:r>
+            <a:r>
+              <a:rPr lang="en-IE" sz="2000" dirty="0" err="1"/>
+              <a:t>getName</a:t>
+            </a:r>
+            <a:r>
+              <a:rPr lang="en-IE" sz="2000" dirty="0"/>
+              <a:t>() {</a:t>
+            </a:r>
+            <a:br>
+              <a:rPr lang="en-IE" sz="2000" dirty="0"/>
+            </a:br>
+            <a:r>
+              <a:rPr lang="en-IE" sz="2000" dirty="0"/>
+              <a:t>    </a:t>
+            </a:r>
+            <a:r>
+              <a:rPr lang="en-IE" sz="2000" b="1" dirty="0">
+                <a:solidFill>
+                  <a:srgbClr val="000080"/>
+                </a:solidFill>
+              </a:rPr>
+              <a:t>return </a:t>
+            </a:r>
+            <a:r>
+              <a:rPr lang="en-IE" sz="2000" b="1" dirty="0">
+                <a:solidFill>
+                  <a:srgbClr val="660E7A"/>
+                </a:solidFill>
+              </a:rPr>
+              <a:t>name</a:t>
+            </a:r>
+            <a:r>
+              <a:rPr lang="en-IE" sz="2000" dirty="0"/>
+              <a:t>;</a:t>
+            </a:r>
+            <a:br>
+              <a:rPr lang="en-IE" sz="2000" dirty="0"/>
+            </a:br>
+            <a:r>
+              <a:rPr lang="en-IE" sz="2000" dirty="0"/>
+              <a:t>}</a:t>
+            </a:r>
+            <a:br>
+              <a:rPr lang="en-IE" sz="2000" dirty="0"/>
+            </a:br>
+            <a:br>
+              <a:rPr lang="en-IE" sz="2000" dirty="0"/>
+            </a:br>
+            <a:r>
+              <a:rPr lang="en-IE" sz="2000" b="1" dirty="0">
+                <a:solidFill>
+                  <a:srgbClr val="000080"/>
+                </a:solidFill>
+              </a:rPr>
+              <a:t>public double </a:t>
+            </a:r>
+            <a:r>
+              <a:rPr lang="en-IE" sz="2000" dirty="0" err="1"/>
+              <a:t>getHeight</a:t>
+            </a:r>
+            <a:r>
+              <a:rPr lang="en-IE" sz="2000" dirty="0"/>
+              <a:t>() {</a:t>
+            </a:r>
+            <a:br>
+              <a:rPr lang="en-IE" sz="2000" dirty="0"/>
+            </a:br>
+            <a:r>
+              <a:rPr lang="en-IE" sz="2000" dirty="0"/>
+              <a:t>    </a:t>
+            </a:r>
+            <a:r>
+              <a:rPr lang="en-IE" sz="2000" b="1" dirty="0">
+                <a:solidFill>
+                  <a:srgbClr val="000080"/>
+                </a:solidFill>
+              </a:rPr>
+              <a:t>return </a:t>
+            </a:r>
+            <a:r>
+              <a:rPr lang="en-IE" sz="2000" b="1" dirty="0">
+                <a:solidFill>
+                  <a:srgbClr val="660E7A"/>
+                </a:solidFill>
+              </a:rPr>
+              <a:t>height</a:t>
+            </a:r>
+            <a:r>
+              <a:rPr lang="en-IE" sz="2000" dirty="0"/>
+              <a:t>;</a:t>
+            </a:r>
+            <a:br>
+              <a:rPr lang="en-IE" sz="2000" dirty="0"/>
+            </a:br>
+            <a:r>
+              <a:rPr lang="en-IE" sz="2000" dirty="0"/>
+              <a:t>}</a:t>
+            </a:r>
+            <a:br>
+              <a:rPr lang="en-IE" sz="2000" dirty="0"/>
+            </a:br>
+            <a:br>
+              <a:rPr lang="en-IE" sz="2000" dirty="0"/>
+            </a:br>
+            <a:r>
+              <a:rPr lang="en-IE" sz="2000" b="1" dirty="0">
+                <a:solidFill>
+                  <a:srgbClr val="000080"/>
+                </a:solidFill>
+              </a:rPr>
+              <a:t>public double </a:t>
+            </a:r>
+            <a:r>
+              <a:rPr lang="en-IE" sz="2000" dirty="0" err="1"/>
+              <a:t>getWeight</a:t>
+            </a:r>
+            <a:r>
+              <a:rPr lang="en-IE" sz="2000" dirty="0"/>
+              <a:t>() {</a:t>
+            </a:r>
+            <a:br>
+              <a:rPr lang="en-IE" sz="2000" dirty="0"/>
+            </a:br>
+            <a:r>
+              <a:rPr lang="en-IE" sz="2000" dirty="0"/>
+              <a:t>    </a:t>
+            </a:r>
+            <a:r>
+              <a:rPr lang="en-IE" sz="2000" b="1" dirty="0">
+                <a:solidFill>
+                  <a:srgbClr val="000080"/>
+                </a:solidFill>
+              </a:rPr>
+              <a:t>return </a:t>
+            </a:r>
+            <a:r>
+              <a:rPr lang="en-IE" sz="2000" b="1" dirty="0">
+                <a:solidFill>
+                  <a:srgbClr val="660E7A"/>
+                </a:solidFill>
+              </a:rPr>
+              <a:t>weight</a:t>
+            </a:r>
+            <a:r>
+              <a:rPr lang="en-IE" sz="2000" dirty="0"/>
+              <a:t>;</a:t>
+            </a:r>
+            <a:br>
+              <a:rPr lang="en-IE" sz="2000" dirty="0"/>
+            </a:br>
+            <a:r>
+              <a:rPr lang="en-IE" sz="2000" dirty="0"/>
+              <a:t>}</a:t>
+            </a:r>
+            <a:br>
+              <a:rPr lang="en-IE" sz="2000" dirty="0"/>
+            </a:br>
+            <a:br>
+              <a:rPr lang="en-IE" sz="2000" dirty="0"/>
+            </a:br>
+            <a:br>
+              <a:rPr lang="en-IE" sz="2000" dirty="0"/>
+            </a:br>
+            <a:r>
+              <a:rPr lang="en-IE" sz="2000" b="1" dirty="0">
+                <a:solidFill>
+                  <a:srgbClr val="000080"/>
+                </a:solidFill>
+              </a:rPr>
+              <a:t>public int </a:t>
+            </a:r>
+            <a:r>
+              <a:rPr lang="en-IE" sz="2000" dirty="0" err="1"/>
+              <a:t>getMembershipNumber</a:t>
+            </a:r>
+            <a:r>
+              <a:rPr lang="en-IE" sz="2000" dirty="0"/>
+              <a:t>() {</a:t>
+            </a:r>
+            <a:br>
+              <a:rPr lang="en-IE" sz="2000" dirty="0"/>
+            </a:br>
+            <a:r>
+              <a:rPr lang="en-IE" sz="2000" dirty="0"/>
+              <a:t>    </a:t>
+            </a:r>
+            <a:r>
+              <a:rPr lang="en-IE" sz="2000" b="1" dirty="0">
+                <a:solidFill>
+                  <a:srgbClr val="000080"/>
+                </a:solidFill>
+              </a:rPr>
+              <a:t>return </a:t>
+            </a:r>
+            <a:r>
+              <a:rPr lang="en-IE" sz="2000" b="1" dirty="0" err="1">
+                <a:solidFill>
+                  <a:srgbClr val="660E7A"/>
+                </a:solidFill>
+              </a:rPr>
+              <a:t>membershipNumber</a:t>
+            </a:r>
+            <a:r>
+              <a:rPr lang="en-IE" sz="2000" dirty="0"/>
+              <a:t>;</a:t>
+            </a:r>
+            <a:br>
+              <a:rPr lang="en-IE" sz="2000" dirty="0"/>
+            </a:br>
+            <a:r>
+              <a:rPr lang="en-IE" sz="2000" dirty="0"/>
+              <a:t>}</a:t>
+            </a:r>
+            <a:br>
+              <a:rPr lang="en-IE" sz="2000" dirty="0"/>
+            </a:br>
+            <a:br>
+              <a:rPr lang="en-IE" sz="2000" dirty="0"/>
+            </a:br>
+            <a:r>
+              <a:rPr lang="en-IE" sz="2000" b="1" dirty="0">
+                <a:solidFill>
+                  <a:srgbClr val="000080"/>
+                </a:solidFill>
+              </a:rPr>
+              <a:t>public </a:t>
+            </a:r>
+            <a:r>
+              <a:rPr lang="en-IE" sz="2000" b="1" dirty="0" err="1">
+                <a:solidFill>
+                  <a:srgbClr val="000080"/>
+                </a:solidFill>
+              </a:rPr>
+              <a:t>boolean</a:t>
+            </a:r>
+            <a:r>
+              <a:rPr lang="en-IE" sz="2000" b="1" dirty="0">
+                <a:solidFill>
+                  <a:srgbClr val="000080"/>
+                </a:solidFill>
+              </a:rPr>
+              <a:t> </a:t>
+            </a:r>
+            <a:r>
+              <a:rPr lang="en-IE" sz="2000" dirty="0" err="1"/>
+              <a:t>isCurrentGymMember</a:t>
+            </a:r>
+            <a:r>
+              <a:rPr lang="en-IE" sz="2000" dirty="0"/>
+              <a:t>() {</a:t>
+            </a:r>
+            <a:br>
+              <a:rPr lang="en-IE" sz="2000" dirty="0"/>
+            </a:br>
+            <a:r>
+              <a:rPr lang="en-IE" sz="2000" dirty="0"/>
+              <a:t>    </a:t>
+            </a:r>
+            <a:r>
+              <a:rPr lang="en-IE" sz="2000" b="1" dirty="0">
+                <a:solidFill>
+                  <a:srgbClr val="000080"/>
+                </a:solidFill>
+              </a:rPr>
+              <a:t>return </a:t>
+            </a:r>
+            <a:r>
+              <a:rPr lang="en-IE" sz="2000" b="1" dirty="0" err="1">
+                <a:solidFill>
+                  <a:srgbClr val="660E7A"/>
+                </a:solidFill>
+              </a:rPr>
+              <a:t>isCurrentGymMember</a:t>
+            </a:r>
+            <a:r>
+              <a:rPr lang="en-IE" sz="2000" dirty="0"/>
+              <a:t>;</a:t>
+            </a:r>
+            <a:br>
+              <a:rPr lang="en-IE" sz="2000" dirty="0"/>
+            </a:br>
+            <a:r>
+              <a:rPr lang="en-IE" sz="2000" dirty="0"/>
+              <a:t>}</a:t>
+            </a:r>
+            <a:endParaRPr lang="en-US" sz="2000" dirty="0"/>
+          </a:p>
+        </p:txBody>
+      </p:sp>
     </p:spTree>
     <p:extLst>
       <p:ext uri="{BB962C8B-B14F-4D97-AF65-F5344CB8AC3E}">
@@ -34166,334 +35538,6 @@
           </a:p>
         </p:txBody>
       </p:sp>
-      <p:sp>
-        <p:nvSpPr>
-          <p:cNvPr id="5" name="TextBox 4"/>
-          <p:cNvSpPr txBox="1"/>
-          <p:nvPr/>
-        </p:nvSpPr>
-        <p:spPr>
-          <a:xfrm>
-            <a:off x="1638301" y="1569064"/>
-            <a:ext cx="3352801" cy="830997"/>
-          </a:xfrm>
-          <a:prstGeom prst="rect">
-            <a:avLst/>
-          </a:prstGeom>
-          <a:solidFill>
-            <a:schemeClr val="bg1">
-              <a:lumMod val="85000"/>
-            </a:schemeClr>
-          </a:solidFill>
-        </p:spPr>
-        <p:style>
-          <a:lnRef idx="1">
-            <a:schemeClr val="accent1"/>
-          </a:lnRef>
-          <a:fillRef idx="2">
-            <a:schemeClr val="accent1"/>
-          </a:fillRef>
-          <a:effectRef idx="1">
-            <a:schemeClr val="accent1"/>
-          </a:effectRef>
-          <a:fontRef idx="minor">
-            <a:schemeClr val="dk1"/>
-          </a:fontRef>
-        </p:style>
-        <p:txBody>
-          <a:bodyPr wrap="square" rtlCol="0">
-            <a:spAutoFit/>
-          </a:bodyPr>
-          <a:lstStyle/>
-          <a:p>
-            <a:pPr algn="ctr"/>
-            <a:r>
-              <a:rPr lang="en-IE" sz="2400" dirty="0"/>
-              <a:t>Object Type/ </a:t>
-            </a:r>
-            <a:r>
-              <a:rPr lang="en-IE" sz="2400" b="1" dirty="0"/>
-              <a:t>Class</a:t>
-            </a:r>
-            <a:r>
-              <a:rPr lang="en-IE" sz="2400" dirty="0"/>
-              <a:t> Name</a:t>
-            </a:r>
-          </a:p>
-          <a:p>
-            <a:pPr algn="ctr"/>
-            <a:r>
-              <a:rPr lang="en-IE" sz="2400" dirty="0"/>
-              <a:t>i.e. </a:t>
-            </a:r>
-            <a:r>
-              <a:rPr lang="en-IE" sz="2400" dirty="0" err="1"/>
-              <a:t>GymMember</a:t>
-            </a:r>
-            <a:endParaRPr lang="en-IE" sz="2400" dirty="0"/>
-          </a:p>
-        </p:txBody>
-      </p:sp>
-      <p:sp>
-        <p:nvSpPr>
-          <p:cNvPr id="10" name="TextBox 9">
-            <a:extLst>
-              <a:ext uri="{FF2B5EF4-FFF2-40B4-BE49-F238E27FC236}">
-                <a16:creationId xmlns:a16="http://schemas.microsoft.com/office/drawing/2014/main" id="{9EA65584-D9F8-47FD-8EF6-E2D83A0BCBAE}"/>
-              </a:ext>
-            </a:extLst>
-          </p:cNvPr>
-          <p:cNvSpPr txBox="1"/>
-          <p:nvPr/>
-        </p:nvSpPr>
-        <p:spPr>
-          <a:xfrm>
-            <a:off x="1330679" y="2848836"/>
-            <a:ext cx="3848100" cy="461665"/>
-          </a:xfrm>
-          <a:prstGeom prst="rect">
-            <a:avLst/>
-          </a:prstGeom>
-          <a:solidFill>
-            <a:schemeClr val="accent5">
-              <a:lumMod val="60000"/>
-              <a:lumOff val="40000"/>
-            </a:schemeClr>
-          </a:solidFill>
-        </p:spPr>
-        <p:style>
-          <a:lnRef idx="1">
-            <a:schemeClr val="accent4"/>
-          </a:lnRef>
-          <a:fillRef idx="2">
-            <a:schemeClr val="accent4"/>
-          </a:fillRef>
-          <a:effectRef idx="1">
-            <a:schemeClr val="accent4"/>
-          </a:effectRef>
-          <a:fontRef idx="minor">
-            <a:schemeClr val="dk1"/>
-          </a:fontRef>
-        </p:style>
-        <p:txBody>
-          <a:bodyPr wrap="square" rtlCol="0">
-            <a:spAutoFit/>
-          </a:bodyPr>
-          <a:lstStyle/>
-          <a:p>
-            <a:pPr algn="ctr"/>
-            <a:r>
-              <a:rPr lang="en-IE" sz="2400" dirty="0"/>
-              <a:t>The </a:t>
-            </a:r>
-            <a:r>
-              <a:rPr lang="en-IE" sz="2400" b="1" dirty="0"/>
-              <a:t>C</a:t>
-            </a:r>
-            <a:r>
-              <a:rPr lang="en-IE" sz="2400" dirty="0"/>
-              <a:t> icon means it is a </a:t>
-            </a:r>
-            <a:r>
-              <a:rPr lang="en-IE" sz="2400" b="1" dirty="0"/>
-              <a:t>Class</a:t>
-            </a:r>
-            <a:r>
-              <a:rPr lang="en-IE" sz="2400" dirty="0"/>
-              <a:t>.</a:t>
-            </a:r>
-          </a:p>
-        </p:txBody>
-      </p:sp>
-      <p:cxnSp>
-        <p:nvCxnSpPr>
-          <p:cNvPr id="12" name="Straight Arrow Connector 11">
-            <a:extLst>
-              <a:ext uri="{FF2B5EF4-FFF2-40B4-BE49-F238E27FC236}">
-                <a16:creationId xmlns:a16="http://schemas.microsoft.com/office/drawing/2014/main" id="{66DB8DED-05D7-4233-89A9-69D12A06D8C0}"/>
-              </a:ext>
-            </a:extLst>
-          </p:cNvPr>
-          <p:cNvCxnSpPr>
-            <a:cxnSpLocks/>
-          </p:cNvCxnSpPr>
-          <p:nvPr/>
-        </p:nvCxnSpPr>
-        <p:spPr>
-          <a:xfrm flipV="1">
-            <a:off x="4991102" y="1798638"/>
-            <a:ext cx="647699" cy="1086112"/>
-          </a:xfrm>
-          <a:prstGeom prst="straightConnector1">
-            <a:avLst/>
-          </a:prstGeom>
-          <a:ln w="28575">
-            <a:solidFill>
-              <a:schemeClr val="accent5"/>
-            </a:solidFill>
-            <a:tailEnd type="arrow"/>
-          </a:ln>
-        </p:spPr>
-        <p:style>
-          <a:lnRef idx="1">
-            <a:schemeClr val="accent1"/>
-          </a:lnRef>
-          <a:fillRef idx="0">
-            <a:schemeClr val="accent1"/>
-          </a:fillRef>
-          <a:effectRef idx="0">
-            <a:schemeClr val="accent1"/>
-          </a:effectRef>
-          <a:fontRef idx="minor">
-            <a:schemeClr val="tx1"/>
-          </a:fontRef>
-        </p:style>
-      </p:cxnSp>
-      <p:sp>
-        <p:nvSpPr>
-          <p:cNvPr id="13" name="TextBox 12">
-            <a:extLst>
-              <a:ext uri="{FF2B5EF4-FFF2-40B4-BE49-F238E27FC236}">
-                <a16:creationId xmlns:a16="http://schemas.microsoft.com/office/drawing/2014/main" id="{53EBAFC0-DD4C-427D-86E5-1622439D0E56}"/>
-              </a:ext>
-            </a:extLst>
-          </p:cNvPr>
-          <p:cNvSpPr txBox="1"/>
-          <p:nvPr/>
-        </p:nvSpPr>
-        <p:spPr>
-          <a:xfrm>
-            <a:off x="1033178" y="3901706"/>
-            <a:ext cx="4700870" cy="461665"/>
-          </a:xfrm>
-          <a:prstGeom prst="rect">
-            <a:avLst/>
-          </a:prstGeom>
-          <a:solidFill>
-            <a:srgbClr val="92D050"/>
-          </a:solidFill>
-        </p:spPr>
-        <p:style>
-          <a:lnRef idx="1">
-            <a:schemeClr val="accent4"/>
-          </a:lnRef>
-          <a:fillRef idx="2">
-            <a:schemeClr val="accent4"/>
-          </a:fillRef>
-          <a:effectRef idx="1">
-            <a:schemeClr val="accent4"/>
-          </a:effectRef>
-          <a:fontRef idx="minor">
-            <a:schemeClr val="dk1"/>
-          </a:fontRef>
-        </p:style>
-        <p:txBody>
-          <a:bodyPr wrap="square" rtlCol="0">
-            <a:spAutoFit/>
-          </a:bodyPr>
-          <a:lstStyle/>
-          <a:p>
-            <a:pPr algn="ctr"/>
-            <a:r>
-              <a:rPr lang="en-IE" sz="2400" dirty="0"/>
-              <a:t>The open padlock means it is </a:t>
-            </a:r>
-            <a:r>
-              <a:rPr lang="en-IE" sz="2400" b="1" dirty="0"/>
-              <a:t>public</a:t>
-            </a:r>
-            <a:r>
-              <a:rPr lang="en-IE" sz="2400" dirty="0"/>
-              <a:t>.</a:t>
-            </a:r>
-          </a:p>
-        </p:txBody>
-      </p:sp>
-      <p:cxnSp>
-        <p:nvCxnSpPr>
-          <p:cNvPr id="14" name="Straight Arrow Connector 13">
-            <a:extLst>
-              <a:ext uri="{FF2B5EF4-FFF2-40B4-BE49-F238E27FC236}">
-                <a16:creationId xmlns:a16="http://schemas.microsoft.com/office/drawing/2014/main" id="{601A018E-A2FD-4EE2-BAD6-1F821407C8A1}"/>
-              </a:ext>
-            </a:extLst>
-          </p:cNvPr>
-          <p:cNvCxnSpPr>
-            <a:cxnSpLocks/>
-          </p:cNvCxnSpPr>
-          <p:nvPr/>
-        </p:nvCxnSpPr>
-        <p:spPr>
-          <a:xfrm flipV="1">
-            <a:off x="5562598" y="1795966"/>
-            <a:ext cx="342900" cy="2105740"/>
-          </a:xfrm>
-          <a:prstGeom prst="straightConnector1">
-            <a:avLst/>
-          </a:prstGeom>
-          <a:ln w="28575">
-            <a:solidFill>
-              <a:schemeClr val="accent3"/>
-            </a:solidFill>
-            <a:tailEnd type="arrow"/>
-          </a:ln>
-        </p:spPr>
-        <p:style>
-          <a:lnRef idx="1">
-            <a:schemeClr val="accent1"/>
-          </a:lnRef>
-          <a:fillRef idx="0">
-            <a:schemeClr val="accent1"/>
-          </a:fillRef>
-          <a:effectRef idx="0">
-            <a:schemeClr val="accent1"/>
-          </a:effectRef>
-          <a:fontRef idx="minor">
-            <a:schemeClr val="tx1"/>
-          </a:fontRef>
-        </p:style>
-      </p:cxnSp>
-      <p:cxnSp>
-        <p:nvCxnSpPr>
-          <p:cNvPr id="11" name="Straight Arrow Connector 10"/>
-          <p:cNvCxnSpPr>
-            <a:cxnSpLocks/>
-            <a:stCxn id="5" idx="3"/>
-          </p:cNvCxnSpPr>
-          <p:nvPr/>
-        </p:nvCxnSpPr>
-        <p:spPr>
-          <a:xfrm flipV="1">
-            <a:off x="4991101" y="1905000"/>
-            <a:ext cx="190500" cy="79562"/>
-          </a:xfrm>
-          <a:prstGeom prst="straightConnector1">
-            <a:avLst/>
-          </a:prstGeom>
-          <a:ln w="28575">
-            <a:solidFill>
-              <a:schemeClr val="bg1">
-                <a:lumMod val="85000"/>
-              </a:schemeClr>
-            </a:solidFill>
-            <a:tailEnd type="arrow"/>
-          </a:ln>
-        </p:spPr>
-        <p:style>
-          <a:lnRef idx="1">
-            <a:schemeClr val="accent1"/>
-          </a:lnRef>
-          <a:fillRef idx="0">
-            <a:schemeClr val="accent1"/>
-          </a:fillRef>
-          <a:effectRef idx="0">
-            <a:schemeClr val="accent1"/>
-          </a:effectRef>
-          <a:fontRef idx="minor">
-            <a:schemeClr val="tx1"/>
-          </a:fontRef>
-        </p:style>
-      </p:cxnSp>
       <p:pic>
         <p:nvPicPr>
           <p:cNvPr id="16" name="Content Placeholder 10" descr="Icon&#10;&#10;Description automatically generated">
@@ -34529,6 +35573,334 @@
           </a:xfrm>
         </p:spPr>
       </p:pic>
+      <p:sp>
+        <p:nvSpPr>
+          <p:cNvPr id="5" name="TextBox 4"/>
+          <p:cNvSpPr txBox="1"/>
+          <p:nvPr/>
+        </p:nvSpPr>
+        <p:spPr>
+          <a:xfrm>
+            <a:off x="1638301" y="1569064"/>
+            <a:ext cx="3352801" cy="830997"/>
+          </a:xfrm>
+          <a:prstGeom prst="rect">
+            <a:avLst/>
+          </a:prstGeom>
+          <a:solidFill>
+            <a:schemeClr val="bg1">
+              <a:lumMod val="85000"/>
+            </a:schemeClr>
+          </a:solidFill>
+        </p:spPr>
+        <p:style>
+          <a:lnRef idx="1">
+            <a:schemeClr val="accent1"/>
+          </a:lnRef>
+          <a:fillRef idx="2">
+            <a:schemeClr val="accent1"/>
+          </a:fillRef>
+          <a:effectRef idx="1">
+            <a:schemeClr val="accent1"/>
+          </a:effectRef>
+          <a:fontRef idx="minor">
+            <a:schemeClr val="dk1"/>
+          </a:fontRef>
+        </p:style>
+        <p:txBody>
+          <a:bodyPr wrap="square" rtlCol="0">
+            <a:spAutoFit/>
+          </a:bodyPr>
+          <a:lstStyle/>
+          <a:p>
+            <a:pPr algn="ctr"/>
+            <a:r>
+              <a:rPr lang="en-IE" sz="2400" dirty="0"/>
+              <a:t>Object Type/ </a:t>
+            </a:r>
+            <a:r>
+              <a:rPr lang="en-IE" sz="2400" b="1" dirty="0"/>
+              <a:t>Class</a:t>
+            </a:r>
+            <a:r>
+              <a:rPr lang="en-IE" sz="2400" dirty="0"/>
+              <a:t> Name</a:t>
+            </a:r>
+          </a:p>
+          <a:p>
+            <a:pPr algn="ctr"/>
+            <a:r>
+              <a:rPr lang="en-IE" sz="2400" dirty="0"/>
+              <a:t>i.e. </a:t>
+            </a:r>
+            <a:r>
+              <a:rPr lang="en-IE" sz="2400" dirty="0" err="1"/>
+              <a:t>GymMember</a:t>
+            </a:r>
+            <a:endParaRPr lang="en-IE" sz="2400" dirty="0"/>
+          </a:p>
+        </p:txBody>
+      </p:sp>
+      <p:sp>
+        <p:nvSpPr>
+          <p:cNvPr id="10" name="TextBox 9">
+            <a:extLst>
+              <a:ext uri="{FF2B5EF4-FFF2-40B4-BE49-F238E27FC236}">
+                <a16:creationId xmlns:a16="http://schemas.microsoft.com/office/drawing/2014/main" id="{9EA65584-D9F8-47FD-8EF6-E2D83A0BCBAE}"/>
+              </a:ext>
+            </a:extLst>
+          </p:cNvPr>
+          <p:cNvSpPr txBox="1"/>
+          <p:nvPr/>
+        </p:nvSpPr>
+        <p:spPr>
+          <a:xfrm>
+            <a:off x="1330679" y="2848836"/>
+            <a:ext cx="3848100" cy="461665"/>
+          </a:xfrm>
+          <a:prstGeom prst="rect">
+            <a:avLst/>
+          </a:prstGeom>
+          <a:solidFill>
+            <a:schemeClr val="accent5">
+              <a:lumMod val="60000"/>
+              <a:lumOff val="40000"/>
+            </a:schemeClr>
+          </a:solidFill>
+        </p:spPr>
+        <p:style>
+          <a:lnRef idx="1">
+            <a:schemeClr val="accent4"/>
+          </a:lnRef>
+          <a:fillRef idx="2">
+            <a:schemeClr val="accent4"/>
+          </a:fillRef>
+          <a:effectRef idx="1">
+            <a:schemeClr val="accent4"/>
+          </a:effectRef>
+          <a:fontRef idx="minor">
+            <a:schemeClr val="dk1"/>
+          </a:fontRef>
+        </p:style>
+        <p:txBody>
+          <a:bodyPr wrap="square" rtlCol="0">
+            <a:spAutoFit/>
+          </a:bodyPr>
+          <a:lstStyle/>
+          <a:p>
+            <a:pPr algn="ctr"/>
+            <a:r>
+              <a:rPr lang="en-IE" sz="2400" dirty="0"/>
+              <a:t>The </a:t>
+            </a:r>
+            <a:r>
+              <a:rPr lang="en-IE" sz="2400" b="1" dirty="0"/>
+              <a:t>C</a:t>
+            </a:r>
+            <a:r>
+              <a:rPr lang="en-IE" sz="2400" dirty="0"/>
+              <a:t> icon means it is a </a:t>
+            </a:r>
+            <a:r>
+              <a:rPr lang="en-IE" sz="2400" b="1" dirty="0"/>
+              <a:t>Class</a:t>
+            </a:r>
+            <a:r>
+              <a:rPr lang="en-IE" sz="2400" dirty="0"/>
+              <a:t>.</a:t>
+            </a:r>
+          </a:p>
+        </p:txBody>
+      </p:sp>
+      <p:cxnSp>
+        <p:nvCxnSpPr>
+          <p:cNvPr id="12" name="Straight Arrow Connector 11">
+            <a:extLst>
+              <a:ext uri="{FF2B5EF4-FFF2-40B4-BE49-F238E27FC236}">
+                <a16:creationId xmlns:a16="http://schemas.microsoft.com/office/drawing/2014/main" id="{66DB8DED-05D7-4233-89A9-69D12A06D8C0}"/>
+              </a:ext>
+            </a:extLst>
+          </p:cNvPr>
+          <p:cNvCxnSpPr>
+            <a:cxnSpLocks/>
+          </p:cNvCxnSpPr>
+          <p:nvPr/>
+        </p:nvCxnSpPr>
+        <p:spPr>
+          <a:xfrm flipV="1">
+            <a:off x="4991102" y="1798638"/>
+            <a:ext cx="647699" cy="1086112"/>
+          </a:xfrm>
+          <a:prstGeom prst="straightConnector1">
+            <a:avLst/>
+          </a:prstGeom>
+          <a:ln w="28575">
+            <a:solidFill>
+              <a:schemeClr val="accent5"/>
+            </a:solidFill>
+            <a:tailEnd type="arrow"/>
+          </a:ln>
+        </p:spPr>
+        <p:style>
+          <a:lnRef idx="1">
+            <a:schemeClr val="accent1"/>
+          </a:lnRef>
+          <a:fillRef idx="0">
+            <a:schemeClr val="accent1"/>
+          </a:fillRef>
+          <a:effectRef idx="0">
+            <a:schemeClr val="accent1"/>
+          </a:effectRef>
+          <a:fontRef idx="minor">
+            <a:schemeClr val="tx1"/>
+          </a:fontRef>
+        </p:style>
+      </p:cxnSp>
+      <p:sp>
+        <p:nvSpPr>
+          <p:cNvPr id="13" name="TextBox 12">
+            <a:extLst>
+              <a:ext uri="{FF2B5EF4-FFF2-40B4-BE49-F238E27FC236}">
+                <a16:creationId xmlns:a16="http://schemas.microsoft.com/office/drawing/2014/main" id="{53EBAFC0-DD4C-427D-86E5-1622439D0E56}"/>
+              </a:ext>
+            </a:extLst>
+          </p:cNvPr>
+          <p:cNvSpPr txBox="1"/>
+          <p:nvPr/>
+        </p:nvSpPr>
+        <p:spPr>
+          <a:xfrm>
+            <a:off x="1033178" y="3901706"/>
+            <a:ext cx="4700870" cy="461665"/>
+          </a:xfrm>
+          <a:prstGeom prst="rect">
+            <a:avLst/>
+          </a:prstGeom>
+          <a:solidFill>
+            <a:srgbClr val="92D050"/>
+          </a:solidFill>
+        </p:spPr>
+        <p:style>
+          <a:lnRef idx="1">
+            <a:schemeClr val="accent4"/>
+          </a:lnRef>
+          <a:fillRef idx="2">
+            <a:schemeClr val="accent4"/>
+          </a:fillRef>
+          <a:effectRef idx="1">
+            <a:schemeClr val="accent4"/>
+          </a:effectRef>
+          <a:fontRef idx="minor">
+            <a:schemeClr val="dk1"/>
+          </a:fontRef>
+        </p:style>
+        <p:txBody>
+          <a:bodyPr wrap="square" rtlCol="0">
+            <a:spAutoFit/>
+          </a:bodyPr>
+          <a:lstStyle/>
+          <a:p>
+            <a:pPr algn="ctr"/>
+            <a:r>
+              <a:rPr lang="en-IE" sz="2400" dirty="0"/>
+              <a:t>The open padlock means it is </a:t>
+            </a:r>
+            <a:r>
+              <a:rPr lang="en-IE" sz="2400" b="1" dirty="0"/>
+              <a:t>public</a:t>
+            </a:r>
+            <a:r>
+              <a:rPr lang="en-IE" sz="2400" dirty="0"/>
+              <a:t>.</a:t>
+            </a:r>
+          </a:p>
+        </p:txBody>
+      </p:sp>
+      <p:cxnSp>
+        <p:nvCxnSpPr>
+          <p:cNvPr id="14" name="Straight Arrow Connector 13">
+            <a:extLst>
+              <a:ext uri="{FF2B5EF4-FFF2-40B4-BE49-F238E27FC236}">
+                <a16:creationId xmlns:a16="http://schemas.microsoft.com/office/drawing/2014/main" id="{601A018E-A2FD-4EE2-BAD6-1F821407C8A1}"/>
+              </a:ext>
+            </a:extLst>
+          </p:cNvPr>
+          <p:cNvCxnSpPr>
+            <a:cxnSpLocks/>
+          </p:cNvCxnSpPr>
+          <p:nvPr/>
+        </p:nvCxnSpPr>
+        <p:spPr>
+          <a:xfrm flipV="1">
+            <a:off x="5562598" y="1795966"/>
+            <a:ext cx="342900" cy="2105740"/>
+          </a:xfrm>
+          <a:prstGeom prst="straightConnector1">
+            <a:avLst/>
+          </a:prstGeom>
+          <a:ln w="28575">
+            <a:solidFill>
+              <a:schemeClr val="accent3"/>
+            </a:solidFill>
+            <a:tailEnd type="arrow"/>
+          </a:ln>
+        </p:spPr>
+        <p:style>
+          <a:lnRef idx="1">
+            <a:schemeClr val="accent1"/>
+          </a:lnRef>
+          <a:fillRef idx="0">
+            <a:schemeClr val="accent1"/>
+          </a:fillRef>
+          <a:effectRef idx="0">
+            <a:schemeClr val="accent1"/>
+          </a:effectRef>
+          <a:fontRef idx="minor">
+            <a:schemeClr val="tx1"/>
+          </a:fontRef>
+        </p:style>
+      </p:cxnSp>
+      <p:cxnSp>
+        <p:nvCxnSpPr>
+          <p:cNvPr id="11" name="Straight Arrow Connector 10"/>
+          <p:cNvCxnSpPr>
+            <a:cxnSpLocks/>
+            <a:stCxn id="5" idx="3"/>
+          </p:cNvCxnSpPr>
+          <p:nvPr/>
+        </p:nvCxnSpPr>
+        <p:spPr>
+          <a:xfrm flipV="1">
+            <a:off x="4991101" y="1905000"/>
+            <a:ext cx="190500" cy="79562"/>
+          </a:xfrm>
+          <a:prstGeom prst="straightConnector1">
+            <a:avLst/>
+          </a:prstGeom>
+          <a:ln w="28575">
+            <a:solidFill>
+              <a:schemeClr val="bg1">
+                <a:lumMod val="85000"/>
+              </a:schemeClr>
+            </a:solidFill>
+            <a:tailEnd type="arrow"/>
+          </a:ln>
+        </p:spPr>
+        <p:style>
+          <a:lnRef idx="1">
+            <a:schemeClr val="accent1"/>
+          </a:lnRef>
+          <a:fillRef idx="0">
+            <a:schemeClr val="accent1"/>
+          </a:fillRef>
+          <a:effectRef idx="0">
+            <a:schemeClr val="accent1"/>
+          </a:effectRef>
+          <a:fontRef idx="minor">
+            <a:schemeClr val="tx1"/>
+          </a:fontRef>
+        </p:style>
+      </p:cxnSp>
       <p:sp>
         <p:nvSpPr>
           <p:cNvPr id="15" name="Rectangle: Rounded Corners 14">
@@ -35450,7 +36822,7 @@
 </file>
 
 <file path=ppt/theme/theme1.xml><?xml version="1.0" encoding="utf-8"?>
-<a:theme xmlns:a="http://schemas.openxmlformats.org/drawingml/2006/main" name="Office Theme">
+<a:theme xmlns:a="http://schemas.openxmlformats.org/drawingml/2006/main" name="a-processing-mouse-event-methods">
   <a:themeElements>
     <a:clrScheme name="Office">
       <a:dk1>
